--- a/tests/outputs/executive-brief-trinh-lanh-dao.pptx
+++ b/tests/outputs/executive-brief-trinh-lanh-dao.pptx
@@ -111,7 +111,7 @@
   <p:extLst>
     <p:ext uri="{521415D9-36F7-43E2-AB2F-B90AF26B5E84}">
       <p14:sectionLst xmlns:p14="http://schemas.microsoft.com/office/powerpoint/2010/main">
-        <p14:section name="Brief" id="{5114b667-7529-c336-1dc0-68077f9d676c}">
+        <p14:section name="Brief" id="{3de86bd8-f004-599e-13ed-d95e752ffc85}">
           <p14:sldIdLst>
             <p14:sldId id="256"/>
             <p14:sldId id="257"/>
@@ -953,8 +953,362 @@
   <p:cSld name="TITLE">
     <p:bg>
       <p:bgPr>
+        <a:blipFill dpi="0" rotWithShape="1">
+          <a:blip r:embed="rId2">
+            <a:lum/>
+          </a:blip>
+          <a:srcRect/>
+          <a:stretch>
+            <a:fillRect/>
+          </a:stretch>
+        </a:blipFill>
+        <a:effectLst/>
+      </p:bgPr>
+    </p:bg>
+    <p:spTree>
+      <p:nvGrpSpPr>
+        <p:cNvPr id="1" name=""/>
+        <p:cNvGrpSpPr/>
+        <p:nvPr/>
+      </p:nvGrpSpPr>
+      <p:grpSpPr>
+        <a:xfrm>
+          <a:off x="0" y="0"/>
+          <a:ext cx="0" cy="0"/>
+          <a:chOff x="0" y="0"/>
+          <a:chExt cx="0" cy="0"/>
+        </a:xfrm>
+      </p:grpSpPr>
+      <p:pic>
+        <p:nvPicPr>
+          <p:cNvPr id="2" name="Image 0" descr="Huy hiệu mẫu (thay bằng logo của trường)">    </p:cNvPr>
+          <p:cNvPicPr>
+            <a:picLocks noChangeAspect="1"/>
+          </p:cNvPicPr>
+          <p:nvPr/>
+        </p:nvPicPr>
+        <p:blipFill>
+          <a:blip r:embed="rId1"/>
+          <a:stretch>
+            <a:fillRect/>
+          </a:stretch>
+        </p:blipFill>
+        <p:spPr>
+          <a:xfrm>
+            <a:off x="548640" y="411480"/>
+            <a:ext cx="502920" cy="502920"/>
+          </a:xfrm>
+          <a:prstGeom prst="rect">
+            <a:avLst/>
+          </a:prstGeom>
+        </p:spPr>
+      </p:pic>
+      <p:sp>
+        <p:nvSpPr>
+          <p:cNvPr id="3" name="Text 0"/>
+          <p:cNvSpPr/>
+          <p:nvPr/>
+        </p:nvSpPr>
+        <p:spPr>
+          <a:xfrm>
+            <a:off x="1188720" y="411480"/>
+            <a:ext cx="5486400" cy="502920"/>
+          </a:xfrm>
+          <a:prstGeom prst="rect">
+            <a:avLst/>
+          </a:prstGeom>
+          <a:noFill/>
+          <a:ln/>
+        </p:spPr>
+        <p:txBody>
+          <a:bodyPr wrap="square" lIns="0" tIns="0" rIns="0" bIns="0" rtlCol="0" anchor="ctr"/>
+          <a:lstStyle/>
+          <a:p>
+            <a:pPr indent="0" marL="0">
+              <a:buNone/>
+            </a:pPr>
+            <a:r>
+              <a:rPr lang="en-US" sz="1400" b="1" dirty="0">
+                <a:solidFill>
+                  <a:srgbClr val="FFFFFF"/>
+                </a:solidFill>
+              </a:rPr>
+              <a:t>Trường Đại học Mẫu A (tên mẫu)</a:t>
+            </a:r>
+            <a:endParaRPr lang="en-US" sz="1400" dirty="0"/>
+          </a:p>
+        </p:txBody>
+      </p:sp>
+      <p:sp>
+        <p:nvSpPr>
+          <p:cNvPr id="4" name="Text 1"/>
+          <p:cNvSpPr/>
+          <p:nvPr>
+            <p:ph idx="102" type="title" hasCustomPrompt="1"/>
+          </p:nvPr>
+        </p:nvSpPr>
+        <p:spPr>
+          <a:xfrm>
+            <a:off x="548640" y="1417320"/>
+            <a:ext cx="6035040" cy="1554480"/>
+          </a:xfrm>
+          <a:prstGeom prst="rect">
+            <a:avLst/>
+          </a:prstGeom>
+          <a:noFill/>
+          <a:ln/>
+        </p:spPr>
+        <p:txBody>
+          <a:bodyPr wrap="square" rtlCol="0"/>
+          <a:lstStyle>
+            <a:lvl1pPr algn="l" indent="0" marL="0">
+              <a:buNone/>
+              <a:defRPr lang="en-US" sz="3600" b="1" dirty="0">
+                <a:solidFill>
+                  <a:srgbClr val="FFFFFF"/>
+                </a:solidFill>
+              </a:defRPr>
+            </a:lvl1pPr>
+          </a:lstStyle>
+          <a:p>
+            <a:pPr algn="l" indent="0" marL="0">
+              <a:buNone/>
+            </a:pPr>
+            <a:endParaRPr lang="en-US" sz="3600" dirty="0"/>
+          </a:p>
+        </p:txBody>
+      </p:sp>
+      <p:sp>
+        <p:nvSpPr>
+          <p:cNvPr id="5" name="Text 1"/>
+          <p:cNvSpPr/>
+          <p:nvPr>
+            <p:ph idx="103" type="body" hasCustomPrompt="1"/>
+          </p:nvPr>
+        </p:nvSpPr>
+        <p:spPr>
+          <a:xfrm>
+            <a:off x="548640" y="3154680"/>
+            <a:ext cx="6035040" cy="1097280"/>
+          </a:xfrm>
+          <a:prstGeom prst="rect">
+            <a:avLst/>
+          </a:prstGeom>
+          <a:noFill/>
+          <a:ln/>
+        </p:spPr>
+        <p:txBody>
+          <a:bodyPr wrap="square" rtlCol="0"/>
+          <a:lstStyle>
+            <a:lvl1pPr algn="l" indent="0" marL="0">
+              <a:buNone/>
+              <a:defRPr lang="en-US" sz="1800" dirty="0">
+                <a:solidFill>
+                  <a:srgbClr val="D6E2F0"/>
+                </a:solidFill>
+              </a:defRPr>
+            </a:lvl1pPr>
+          </a:lstStyle>
+          <a:p>
+            <a:pPr algn="l" indent="0" marL="0">
+              <a:buNone/>
+            </a:pPr>
+            <a:endParaRPr lang="en-US" sz="1800" dirty="0"/>
+          </a:p>
+        </p:txBody>
+      </p:sp>
+    </p:spTree>
+  </p:cSld>
+  <p:clrMapOvr>
+    <a:masterClrMapping/>
+  </p:clrMapOvr>
+</p:sldLayout>
+</file>
+
+<file path=ppt/slideLayouts/slideLayout3.xml><?xml version="1.0" encoding="utf-8"?>
+<p:sldLayout xmlns:a="http://schemas.openxmlformats.org/drawingml/2006/main" xmlns:r="http://schemas.openxmlformats.org/officeDocument/2006/relationships" xmlns:p="http://schemas.openxmlformats.org/presentationml/2006/main" preserve="1">
+  <p:cSld name="CLOSING">
+    <p:bg>
+      <p:bgPr>
+        <a:blipFill dpi="0" rotWithShape="1">
+          <a:blip r:embed="rId2">
+            <a:lum/>
+          </a:blip>
+          <a:srcRect/>
+          <a:stretch>
+            <a:fillRect/>
+          </a:stretch>
+        </a:blipFill>
+        <a:effectLst/>
+      </p:bgPr>
+    </p:bg>
+    <p:spTree>
+      <p:nvGrpSpPr>
+        <p:cNvPr id="1" name=""/>
+        <p:cNvGrpSpPr/>
+        <p:nvPr/>
+      </p:nvGrpSpPr>
+      <p:grpSpPr>
+        <a:xfrm>
+          <a:off x="0" y="0"/>
+          <a:ext cx="0" cy="0"/>
+          <a:chOff x="0" y="0"/>
+          <a:chExt cx="0" cy="0"/>
+        </a:xfrm>
+      </p:grpSpPr>
+      <p:pic>
+        <p:nvPicPr>
+          <p:cNvPr id="2" name="Image 0" descr="Huy hiệu mẫu (thay bằng logo của trường)">    </p:cNvPr>
+          <p:cNvPicPr>
+            <a:picLocks noChangeAspect="1"/>
+          </p:cNvPicPr>
+          <p:nvPr/>
+        </p:nvPicPr>
+        <p:blipFill>
+          <a:blip r:embed="rId1"/>
+          <a:stretch>
+            <a:fillRect/>
+          </a:stretch>
+        </p:blipFill>
+        <p:spPr>
+          <a:xfrm>
+            <a:off x="548640" y="411480"/>
+            <a:ext cx="502920" cy="502920"/>
+          </a:xfrm>
+          <a:prstGeom prst="rect">
+            <a:avLst/>
+          </a:prstGeom>
+        </p:spPr>
+      </p:pic>
+      <p:sp>
+        <p:nvSpPr>
+          <p:cNvPr id="3" name="Text 0"/>
+          <p:cNvSpPr/>
+          <p:nvPr/>
+        </p:nvSpPr>
+        <p:spPr>
+          <a:xfrm>
+            <a:off x="1188720" y="411480"/>
+            <a:ext cx="5486400" cy="502920"/>
+          </a:xfrm>
+          <a:prstGeom prst="rect">
+            <a:avLst/>
+          </a:prstGeom>
+          <a:noFill/>
+          <a:ln/>
+        </p:spPr>
+        <p:txBody>
+          <a:bodyPr wrap="square" lIns="0" tIns="0" rIns="0" bIns="0" rtlCol="0" anchor="ctr"/>
+          <a:lstStyle/>
+          <a:p>
+            <a:pPr indent="0" marL="0">
+              <a:buNone/>
+            </a:pPr>
+            <a:r>
+              <a:rPr lang="en-US" sz="1400" b="1" dirty="0">
+                <a:solidFill>
+                  <a:srgbClr val="FFFFFF"/>
+                </a:solidFill>
+              </a:rPr>
+              <a:t>Trường Đại học Mẫu A (tên mẫu)</a:t>
+            </a:r>
+            <a:endParaRPr lang="en-US" sz="1400" dirty="0"/>
+          </a:p>
+        </p:txBody>
+      </p:sp>
+      <p:sp>
+        <p:nvSpPr>
+          <p:cNvPr id="4" name="Text 1"/>
+          <p:cNvSpPr/>
+          <p:nvPr>
+            <p:ph idx="102" type="title" hasCustomPrompt="1"/>
+          </p:nvPr>
+        </p:nvSpPr>
+        <p:spPr>
+          <a:xfrm>
+            <a:off x="548640" y="1417320"/>
+            <a:ext cx="6035040" cy="1554480"/>
+          </a:xfrm>
+          <a:prstGeom prst="rect">
+            <a:avLst/>
+          </a:prstGeom>
+          <a:noFill/>
+          <a:ln/>
+        </p:spPr>
+        <p:txBody>
+          <a:bodyPr wrap="square" rtlCol="0"/>
+          <a:lstStyle>
+            <a:lvl1pPr algn="l" indent="0" marL="0">
+              <a:buNone/>
+              <a:defRPr lang="en-US" sz="3600" b="1" dirty="0">
+                <a:solidFill>
+                  <a:srgbClr val="FFFFFF"/>
+                </a:solidFill>
+              </a:defRPr>
+            </a:lvl1pPr>
+          </a:lstStyle>
+          <a:p>
+            <a:pPr algn="l" indent="0" marL="0">
+              <a:buNone/>
+            </a:pPr>
+            <a:endParaRPr lang="en-US" sz="3600" dirty="0"/>
+          </a:p>
+        </p:txBody>
+      </p:sp>
+      <p:sp>
+        <p:nvSpPr>
+          <p:cNvPr id="5" name="Text 1"/>
+          <p:cNvSpPr/>
+          <p:nvPr>
+            <p:ph idx="103" type="body" hasCustomPrompt="1"/>
+          </p:nvPr>
+        </p:nvSpPr>
+        <p:spPr>
+          <a:xfrm>
+            <a:off x="548640" y="3154680"/>
+            <a:ext cx="6035040" cy="1097280"/>
+          </a:xfrm>
+          <a:prstGeom prst="rect">
+            <a:avLst/>
+          </a:prstGeom>
+          <a:noFill/>
+          <a:ln/>
+        </p:spPr>
+        <p:txBody>
+          <a:bodyPr wrap="square" rtlCol="0"/>
+          <a:lstStyle>
+            <a:lvl1pPr algn="l" indent="0" marL="0">
+              <a:buNone/>
+              <a:defRPr lang="en-US" sz="1800" dirty="0">
+                <a:solidFill>
+                  <a:srgbClr val="D6E2F0"/>
+                </a:solidFill>
+              </a:defRPr>
+            </a:lvl1pPr>
+          </a:lstStyle>
+          <a:p>
+            <a:pPr algn="l" indent="0" marL="0">
+              <a:buNone/>
+            </a:pPr>
+            <a:endParaRPr lang="en-US" sz="1800" dirty="0"/>
+          </a:p>
+        </p:txBody>
+      </p:sp>
+    </p:spTree>
+  </p:cSld>
+  <p:clrMapOvr>
+    <a:masterClrMapping/>
+  </p:clrMapOvr>
+</p:sldLayout>
+</file>
+
+<file path=ppt/slideLayouts/slideLayout4.xml><?xml version="1.0" encoding="utf-8"?>
+<p:sldLayout xmlns:a="http://schemas.openxmlformats.org/drawingml/2006/main" xmlns:r="http://schemas.openxmlformats.org/officeDocument/2006/relationships" xmlns:p="http://schemas.openxmlformats.org/presentationml/2006/main" preserve="1">
+  <p:cSld name="SECTION">
+    <p:bg>
+      <p:bgPr>
         <a:solidFill>
-          <a:srgbClr val="0F3D3E"/>
+          <a:srgbClr val="0B2A4A"/>
         </a:solidFill>
       </p:bgPr>
     </p:bg>
@@ -977,13 +1331,13 @@
           <p:cNvPr id="2" name="Text 0"/>
           <p:cNvSpPr/>
           <p:nvPr>
-            <p:ph idx="100" type="title" hasCustomPrompt="1"/>
+            <p:ph idx="100" type="body" hasCustomPrompt="1"/>
           </p:nvPr>
         </p:nvSpPr>
         <p:spPr>
           <a:xfrm>
-            <a:off x="548640" y="1371600"/>
-            <a:ext cx="8046720" cy="1371600"/>
+            <a:off x="548640" y="1097280"/>
+            <a:ext cx="2286000" cy="1463040"/>
           </a:xfrm>
           <a:prstGeom prst="rect">
             <a:avLst/>
@@ -996,7 +1350,49 @@
           <a:lstStyle>
             <a:lvl1pPr algn="l" indent="0" marL="0">
               <a:buNone/>
-              <a:defRPr lang="en-US" sz="3600" b="1" dirty="0">
+              <a:defRPr lang="en-US" sz="8000" b="1" dirty="0">
+                <a:solidFill>
+                  <a:srgbClr val="B8902B"/>
+                </a:solidFill>
+                <a:latin typeface="Cambria" pitchFamily="34" charset="0"/>
+                <a:ea typeface="Cambria" pitchFamily="34" charset="-122"/>
+                <a:cs typeface="Cambria" pitchFamily="34" charset="-120"/>
+              </a:defRPr>
+            </a:lvl1pPr>
+          </a:lstStyle>
+          <a:p>
+            <a:pPr algn="l" indent="0" marL="0">
+              <a:buNone/>
+            </a:pPr>
+            <a:endParaRPr lang="en-US" sz="8000" dirty="0"/>
+          </a:p>
+        </p:txBody>
+      </p:sp>
+      <p:sp>
+        <p:nvSpPr>
+          <p:cNvPr id="3" name="Text 0"/>
+          <p:cNvSpPr/>
+          <p:nvPr>
+            <p:ph idx="101" type="title" hasCustomPrompt="1"/>
+          </p:nvPr>
+        </p:nvSpPr>
+        <p:spPr>
+          <a:xfrm>
+            <a:off x="2926080" y="1097280"/>
+            <a:ext cx="5669280" cy="1463040"/>
+          </a:xfrm>
+          <a:prstGeom prst="rect">
+            <a:avLst/>
+          </a:prstGeom>
+          <a:noFill/>
+          <a:ln/>
+        </p:spPr>
+        <p:txBody>
+          <a:bodyPr wrap="square" rtlCol="0"/>
+          <a:lstStyle>
+            <a:lvl1pPr algn="l" indent="0" marL="0">
+              <a:buNone/>
+              <a:defRPr lang="en-US" sz="3400" b="1" dirty="0">
                 <a:solidFill>
                   <a:srgbClr val="FFFFFF"/>
                 </a:solidFill>
@@ -1007,46 +1403,7 @@
             <a:pPr algn="l" indent="0" marL="0">
               <a:buNone/>
             </a:pPr>
-            <a:endParaRPr lang="en-US" sz="3600" dirty="0"/>
-          </a:p>
-        </p:txBody>
-      </p:sp>
-      <p:sp>
-        <p:nvSpPr>
-          <p:cNvPr id="3" name="Text 0"/>
-          <p:cNvSpPr/>
-          <p:nvPr>
-            <p:ph idx="101" type="body" hasCustomPrompt="1"/>
-          </p:nvPr>
-        </p:nvSpPr>
-        <p:spPr>
-          <a:xfrm>
-            <a:off x="548640" y="2926080"/>
-            <a:ext cx="8046720" cy="914400"/>
-          </a:xfrm>
-          <a:prstGeom prst="rect">
-            <a:avLst/>
-          </a:prstGeom>
-          <a:noFill/>
-          <a:ln/>
-        </p:spPr>
-        <p:txBody>
-          <a:bodyPr wrap="square" rtlCol="0"/>
-          <a:lstStyle>
-            <a:lvl1pPr algn="l" indent="0" marL="0">
-              <a:buNone/>
-              <a:defRPr lang="en-US" sz="1800" dirty="0">
-                <a:solidFill>
-                  <a:srgbClr val="CFE3E1"/>
-                </a:solidFill>
-              </a:defRPr>
-            </a:lvl1pPr>
-          </a:lstStyle>
-          <a:p>
-            <a:pPr algn="l" indent="0" marL="0">
-              <a:buNone/>
-            </a:pPr>
-            <a:endParaRPr lang="en-US" sz="1800" dirty="0"/>
+            <a:endParaRPr lang="en-US" sz="3400" dirty="0"/>
           </a:p>
         </p:txBody>
       </p:sp>
@@ -1058,7 +1415,7 @@
 </p:sldLayout>
 </file>
 
-<file path=ppt/slideLayouts/slideLayout3.xml><?xml version="1.0" encoding="utf-8"?>
+<file path=ppt/slideLayouts/slideLayout5.xml><?xml version="1.0" encoding="utf-8"?>
 <p:sldLayout xmlns:a="http://schemas.openxmlformats.org/drawingml/2006/main" xmlns:r="http://schemas.openxmlformats.org/officeDocument/2006/relationships" xmlns:p="http://schemas.openxmlformats.org/presentationml/2006/main" preserve="1">
   <p:cSld name="CONTENT">
     <p:bg>
@@ -1092,8 +1449,8 @@
         </p:nvSpPr>
         <p:spPr>
           <a:xfrm>
-            <a:off x="457200" y="274320"/>
-            <a:ext cx="8229600" cy="868680"/>
+            <a:off x="548640" y="274320"/>
+            <a:ext cx="8046720" cy="868680"/>
           </a:xfrm>
           <a:prstGeom prst="rect">
             <a:avLst/>
@@ -1108,7 +1465,7 @@
               <a:buNone/>
               <a:defRPr lang="en-US" sz="2800" b="1" dirty="0">
                 <a:solidFill>
-                  <a:srgbClr val="0F3D3E"/>
+                  <a:srgbClr val="0B2A4A"/>
                 </a:solidFill>
               </a:defRPr>
             </a:lvl1pPr>
@@ -1118,6 +1475,87 @@
               <a:buNone/>
             </a:pPr>
             <a:endParaRPr lang="en-US" sz="2800" dirty="0"/>
+          </a:p>
+        </p:txBody>
+      </p:sp>
+      <p:sp>
+        <p:nvSpPr>
+          <p:cNvPr id="3" name="Text 0"/>
+          <p:cNvSpPr/>
+          <p:nvPr/>
+        </p:nvSpPr>
+        <p:spPr>
+          <a:xfrm>
+            <a:off x="548640" y="4727448"/>
+            <a:ext cx="5943600" cy="274320"/>
+          </a:xfrm>
+          <a:prstGeom prst="rect">
+            <a:avLst/>
+          </a:prstGeom>
+          <a:noFill/>
+          <a:ln/>
+        </p:spPr>
+        <p:txBody>
+          <a:bodyPr wrap="square" lIns="0" tIns="0" rIns="0" bIns="0" rtlCol="0" anchor="ctr"/>
+          <a:lstStyle/>
+          <a:p>
+            <a:pPr indent="0" marL="0">
+              <a:buNone/>
+            </a:pPr>
+            <a:r>
+              <a:rPr lang="en-US" sz="1100" dirty="0">
+                <a:solidFill>
+                  <a:srgbClr val="6B7A90"/>
+                </a:solidFill>
+              </a:rPr>
+              <a:t>Executive brief · Nâng cấp wifi giảng đường</a:t>
+            </a:r>
+            <a:endParaRPr lang="en-US" sz="1100" dirty="0"/>
+          </a:p>
+        </p:txBody>
+      </p:sp>
+      <p:sp>
+        <p:nvSpPr>
+          <p:cNvPr id="25" name="Slide Number Placeholder 0"/>
+          <p:cNvSpPr>
+            <a:spLocks noGrp="1"/>
+          </p:cNvSpPr>
+          <p:nvPr>
+            <p:ph type="sldNum" sz="quarter" idx="4294967295"/>
+          </p:nvPr>
+        </p:nvSpPr>
+        <p:spPr>
+          <a:xfrm>
+            <a:off x="8138160" y="4727448"/>
+            <a:ext cx="457200" cy="274320"/>
+          </a:xfrm>
+          <a:prstGeom prst="rect">
+            <a:avLst/>
+          </a:prstGeom>
+          <a:extLst>
+            <a:ext uri="{C572A759-6A51-4108-AA02-DFA0A04FC94B}">
+              <ma14:wrappingTextBoxFlag xmlns:ma14="http://schemas.microsoft.com/office/mac/drawingml/2011/main" val="0"/>
+            </a:ext>
+          </a:extLst>
+        </p:spPr>
+        <p:txBody>
+          <a:bodyPr/>
+          <a:lstStyle>
+            <a:lvl1pPr>
+              <a:defRPr sz="1100">
+                <a:solidFill>
+                  <a:srgbClr val="6B7A90"/>
+                </a:solidFill>
+              </a:defRPr>
+            </a:lvl1pPr>
+          </a:lstStyle>
+          <a:p>
+            <a:pPr algn="r"/>
+            <a:fld id="{F7021451-1387-4CA6-816F-3879F97B5CBC}" type="slidenum">
+              <a:rPr b="0" lang="en-US"/>
+              <a:t>1005</a:t>
+            </a:fld>
+            <a:endParaRPr lang="en-US"/>
           </a:p>
         </p:txBody>
       </p:sp>
@@ -1146,6 +1584,51 @@
           <a:chExt cx="0" cy="0"/>
         </a:xfrm>
       </p:grpSpPr>
+      <p:sp>
+        <p:nvSpPr>
+          <p:cNvPr id="25" name="Slide Number Placeholder 0"/>
+          <p:cNvSpPr>
+            <a:spLocks noGrp="1"/>
+          </p:cNvSpPr>
+          <p:nvPr>
+            <p:ph type="sldNum" sz="quarter" idx="4294967295"/>
+          </p:nvPr>
+        </p:nvSpPr>
+        <p:spPr>
+          <a:xfrm>
+            <a:off x="8138160" y="4727448"/>
+            <a:ext cx="457200" cy="274320"/>
+          </a:xfrm>
+          <a:prstGeom prst="rect">
+            <a:avLst/>
+          </a:prstGeom>
+          <a:extLst>
+            <a:ext uri="{C572A759-6A51-4108-AA02-DFA0A04FC94B}">
+              <ma14:wrappingTextBoxFlag xmlns:ma14="http://schemas.microsoft.com/office/mac/drawingml/2011/main" val="0"/>
+            </a:ext>
+          </a:extLst>
+        </p:spPr>
+        <p:txBody>
+          <a:bodyPr/>
+          <a:lstStyle>
+            <a:lvl1pPr>
+              <a:defRPr sz="1100">
+                <a:solidFill>
+                  <a:srgbClr val="6B7A90"/>
+                </a:solidFill>
+              </a:defRPr>
+            </a:lvl1pPr>
+          </a:lstStyle>
+          <a:p>
+            <a:pPr algn="r"/>
+            <a:fld id="{F7021451-1387-4CA6-816F-3879F97B5CBC}" type="slidenum">
+              <a:rPr b="0" lang="en-US"/>
+              <a:t>null</a:t>
+            </a:fld>
+            <a:endParaRPr lang="en-US"/>
+          </a:p>
+        </p:txBody>
+      </p:sp>
     </p:spTree>
   </p:cSld>
   <p:clrMap bg1="lt1" tx1="dk1" bg2="lt2" tx2="dk2" accent1="accent1" accent2="accent2" accent3="accent3" accent4="accent4" accent5="accent5" accent6="accent6" hlink="hlink" folHlink="folHlink"/>
@@ -1153,6 +1636,8 @@
     <p:sldLayoutId id="2147483649" r:id="rId1"/>
     <p:sldLayoutId id="2147483650" r:id="rId2"/>
     <p:sldLayoutId id="2147483651" r:id="rId3"/>
+    <p:sldLayoutId id="2147483652" r:id="rId4"/>
+    <p:sldLayoutId id="2147483653" r:id="rId5"/>
   </p:sldLayoutIdLst>
   <p:hf sldNum="0" hdr="0" ftr="0" dt="0"/>
   <p:txStyles>
@@ -1427,16 +1912,16 @@
       </p:grpSpPr>
       <p:sp>
         <p:nvSpPr>
-          <p:cNvPr id="2" name="Text 0"/>
+          <p:cNvPr id="2" name="Text 1"/>
           <p:cNvSpPr/>
           <p:nvPr>
-            <p:ph idx="100" type="title" hasCustomPrompt="1"/>
+            <p:ph idx="102" type="title" hasCustomPrompt="1"/>
           </p:nvPr>
         </p:nvSpPr>
         <p:spPr>
           <a:xfrm>
-            <a:off x="548640" y="1371600"/>
-            <a:ext cx="8046720" cy="1371600"/>
+            <a:off x="548640" y="1417320"/>
+            <a:ext cx="6035040" cy="1554480"/>
           </a:xfrm>
           <a:prstGeom prst="rect">
             <a:avLst/>
@@ -1465,16 +1950,16 @@
       </p:sp>
       <p:sp>
         <p:nvSpPr>
-          <p:cNvPr id="3" name="Text 0"/>
+          <p:cNvPr id="3" name="Text 1"/>
           <p:cNvSpPr/>
           <p:nvPr>
-            <p:ph idx="101" type="body" hasCustomPrompt="1"/>
+            <p:ph idx="103" type="body" hasCustomPrompt="1"/>
           </p:nvPr>
         </p:nvSpPr>
         <p:spPr>
           <a:xfrm>
-            <a:off x="548640" y="2926080"/>
-            <a:ext cx="8046720" cy="914400"/>
+            <a:off x="548640" y="3154680"/>
+            <a:ext cx="6035040" cy="1097280"/>
           </a:xfrm>
           <a:prstGeom prst="rect">
             <a:avLst/>
@@ -1492,10 +1977,10 @@
             <a:r>
               <a:rPr lang="en-US" sz="1800" dirty="0">
                 <a:solidFill>
-                  <a:srgbClr val="CFE3E1"/>
+                  <a:srgbClr val="D6E2F0"/>
                 </a:solidFill>
               </a:rPr>
-              <a:t>Executive brief · Thời hạn quyết định: chưa xác định</a:t>
+              <a:t>Executive brief cho lãnh đạo · Thời hạn quyết định: chưa xác định</a:t>
             </a:r>
             <a:endParaRPr lang="en-US" sz="1800" dirty="0"/>
           </a:p>
@@ -1536,8 +2021,8 @@
         </p:nvSpPr>
         <p:spPr>
           <a:xfrm>
-            <a:off x="457200" y="274320"/>
-            <a:ext cx="8229600" cy="868680"/>
+            <a:off x="548640" y="274320"/>
+            <a:ext cx="8046720" cy="868680"/>
           </a:xfrm>
           <a:prstGeom prst="rect">
             <a:avLst/>
@@ -1555,10 +2040,10 @@
             <a:r>
               <a:rPr lang="en-US" sz="2800" b="1" dirty="0">
                 <a:solidFill>
-                  <a:srgbClr val="0F3D3E"/>
+                  <a:srgbClr val="0B2A4A"/>
                 </a:solidFill>
               </a:rPr>
-              <a:t>Sinh viên chấm wifi thấp nhất trong các câu hỏi</a:t>
+              <a:t>Sinh viên chấm wifi thấp nhất trong các câu hỏi khảo sát</a:t>
             </a:r>
             <a:endParaRPr lang="en-US" sz="2800" dirty="0"/>
           </a:p>
@@ -1572,20 +2057,20 @@
         </p:nvSpPr>
         <p:spPr>
           <a:xfrm>
-            <a:off x="457200" y="1371600"/>
-            <a:ext cx="2606040" cy="1737360"/>
+            <a:off x="548640" y="1325880"/>
+            <a:ext cx="2560320" cy="2926080"/>
           </a:xfrm>
           <a:prstGeom prst="roundRect">
             <a:avLst>
-              <a:gd name="adj" fmla="val 5263"/>
+              <a:gd name="adj" fmla="val 2857"/>
             </a:avLst>
           </a:prstGeom>
           <a:solidFill>
-            <a:srgbClr val="EEF3F2"/>
+            <a:srgbClr val="F1F4F8"/>
           </a:solidFill>
           <a:ln w="12700">
             <a:solidFill>
-              <a:srgbClr val="EEF3F2"/>
+              <a:srgbClr val="F1F4F8"/>
             </a:solidFill>
             <a:prstDash val="solid"/>
           </a:ln>
@@ -1593,14 +2078,63 @@
       </p:sp>
       <p:sp>
         <p:nvSpPr>
-          <p:cNvPr id="5" name="so-lieu"/>
+          <p:cNvPr id="5" name="o-bieu-tuong"/>
+          <p:cNvSpPr/>
+          <p:nvPr/>
+        </p:nvSpPr>
+        <p:spPr>
+          <a:xfrm>
+            <a:off x="777240" y="1554480"/>
+            <a:ext cx="548640" cy="548640"/>
+          </a:xfrm>
+          <a:prstGeom prst="ellipse">
+            <a:avLst/>
+          </a:prstGeom>
+          <a:solidFill>
+            <a:srgbClr val="A23B3B"/>
+          </a:solidFill>
+          <a:ln w="12700">
+            <a:solidFill>
+              <a:srgbClr val="A23B3B"/>
+            </a:solidFill>
+            <a:prstDash val="solid"/>
+          </a:ln>
+        </p:spPr>
+      </p:sp>
+      <p:pic>
+        <p:nvPicPr>
+          <p:cNvPr id="6" name="bieu-tuong" descr="Biểu tượng minh họa">    </p:cNvPr>
+          <p:cNvPicPr>
+            <a:picLocks noChangeAspect="1"/>
+          </p:cNvPicPr>
+          <p:nvPr/>
+        </p:nvPicPr>
+        <p:blipFill>
+          <a:blip r:embed="rId1"/>
+          <a:stretch>
+            <a:fillRect/>
+          </a:stretch>
+        </p:blipFill>
+        <p:spPr>
+          <a:xfrm>
+            <a:off x="914400" y="1691640"/>
+            <a:ext cx="274320" cy="274320"/>
+          </a:xfrm>
+          <a:prstGeom prst="rect">
+            <a:avLst/>
+          </a:prstGeom>
+        </p:spPr>
+      </p:pic>
+      <p:sp>
+        <p:nvSpPr>
+          <p:cNvPr id="7" name="so-lieu"/>
           <p:cNvSpPr txBox="1"/>
           <p:nvPr/>
         </p:nvSpPr>
         <p:spPr>
           <a:xfrm>
-            <a:off x="594360" y="1508760"/>
-            <a:ext cx="2331720" cy="822960"/>
+            <a:off x="777240" y="2240280"/>
+            <a:ext cx="2103120" cy="777240"/>
           </a:xfrm>
           <a:prstGeom prst="rect">
             <a:avLst/>
@@ -1618,7 +2152,7 @@
             <a:r>
               <a:rPr lang="en-US" sz="4000" b="1" dirty="0">
                 <a:solidFill>
-                  <a:srgbClr val="B5473A"/>
+                  <a:srgbClr val="A23B3B"/>
                 </a:solidFill>
                 <a:latin typeface="Cambria" pitchFamily="34" charset="0"/>
                 <a:ea typeface="Cambria" pitchFamily="34" charset="-122"/>
@@ -1632,14 +2166,14 @@
       </p:sp>
       <p:sp>
         <p:nvSpPr>
-          <p:cNvPr id="6" name="nhan"/>
+          <p:cNvPr id="8" name="nhan"/>
           <p:cNvSpPr txBox="1"/>
           <p:nvPr/>
         </p:nvSpPr>
         <p:spPr>
           <a:xfrm>
-            <a:off x="594360" y="2331720"/>
-            <a:ext cx="2331720" cy="685800"/>
+            <a:off x="777240" y="3063240"/>
+            <a:ext cx="2103120" cy="1051560"/>
           </a:xfrm>
           <a:prstGeom prst="rect">
             <a:avLst/>
@@ -1655,39 +2189,39 @@
               <a:buNone/>
             </a:pPr>
             <a:r>
-              <a:rPr lang="en-US" sz="1400" dirty="0">
+              <a:rPr lang="en-US" sz="1600" dirty="0">
                 <a:solidFill>
-                  <a:srgbClr val="1B1F2A"/>
+                  <a:srgbClr val="1A2433"/>
                 </a:solidFill>
               </a:rPr>
               <a:t>điểm trung bình câu 'Mạng wifi ổn định' (thang 1–5)</a:t>
             </a:r>
-            <a:endParaRPr lang="en-US" sz="1400" dirty="0"/>
+            <a:endParaRPr lang="en-US" sz="1600" dirty="0"/>
           </a:p>
         </p:txBody>
       </p:sp>
       <p:sp>
         <p:nvSpPr>
-          <p:cNvPr id="7" name="the"/>
+          <p:cNvPr id="9" name="the"/>
           <p:cNvSpPr/>
           <p:nvPr/>
         </p:nvSpPr>
         <p:spPr>
           <a:xfrm>
-            <a:off x="3268980" y="1371600"/>
-            <a:ext cx="2606040" cy="1737360"/>
+            <a:off x="3291840" y="1325880"/>
+            <a:ext cx="2560320" cy="2926080"/>
           </a:xfrm>
           <a:prstGeom prst="roundRect">
             <a:avLst>
-              <a:gd name="adj" fmla="val 5263"/>
+              <a:gd name="adj" fmla="val 2857"/>
             </a:avLst>
           </a:prstGeom>
           <a:solidFill>
-            <a:srgbClr val="EEF3F2"/>
+            <a:srgbClr val="F1F4F8"/>
           </a:solidFill>
           <a:ln w="12700">
             <a:solidFill>
-              <a:srgbClr val="EEF3F2"/>
+              <a:srgbClr val="F1F4F8"/>
             </a:solidFill>
             <a:prstDash val="solid"/>
           </a:ln>
@@ -1695,14 +2229,63 @@
       </p:sp>
       <p:sp>
         <p:nvSpPr>
-          <p:cNvPr id="8" name="so-lieu"/>
+          <p:cNvPr id="10" name="o-bieu-tuong"/>
+          <p:cNvSpPr/>
+          <p:nvPr/>
+        </p:nvSpPr>
+        <p:spPr>
+          <a:xfrm>
+            <a:off x="3520440" y="1554480"/>
+            <a:ext cx="548640" cy="548640"/>
+          </a:xfrm>
+          <a:prstGeom prst="ellipse">
+            <a:avLst/>
+          </a:prstGeom>
+          <a:solidFill>
+            <a:srgbClr val="A23B3B"/>
+          </a:solidFill>
+          <a:ln w="12700">
+            <a:solidFill>
+              <a:srgbClr val="A23B3B"/>
+            </a:solidFill>
+            <a:prstDash val="solid"/>
+          </a:ln>
+        </p:spPr>
+      </p:sp>
+      <p:pic>
+        <p:nvPicPr>
+          <p:cNvPr id="11" name="bieu-tuong" descr="Biểu tượng minh họa">    </p:cNvPr>
+          <p:cNvPicPr>
+            <a:picLocks noChangeAspect="1"/>
+          </p:cNvPicPr>
+          <p:nvPr/>
+        </p:nvPicPr>
+        <p:blipFill>
+          <a:blip r:embed="rId2"/>
+          <a:stretch>
+            <a:fillRect/>
+          </a:stretch>
+        </p:blipFill>
+        <p:spPr>
+          <a:xfrm>
+            <a:off x="3657600" y="1691640"/>
+            <a:ext cx="274320" cy="274320"/>
+          </a:xfrm>
+          <a:prstGeom prst="rect">
+            <a:avLst/>
+          </a:prstGeom>
+        </p:spPr>
+      </p:pic>
+      <p:sp>
+        <p:nvSpPr>
+          <p:cNvPr id="12" name="so-lieu"/>
           <p:cNvSpPr txBox="1"/>
           <p:nvPr/>
         </p:nvSpPr>
         <p:spPr>
           <a:xfrm>
-            <a:off x="3406140" y="1508760"/>
-            <a:ext cx="2331720" cy="822960"/>
+            <a:off x="3520440" y="2240280"/>
+            <a:ext cx="2103120" cy="777240"/>
           </a:xfrm>
           <a:prstGeom prst="rect">
             <a:avLst/>
@@ -1720,7 +2303,7 @@
             <a:r>
               <a:rPr lang="en-US" sz="4000" b="1" dirty="0">
                 <a:solidFill>
-                  <a:srgbClr val="B5473A"/>
+                  <a:srgbClr val="A23B3B"/>
                 </a:solidFill>
                 <a:latin typeface="Cambria" pitchFamily="34" charset="0"/>
                 <a:ea typeface="Cambria" pitchFamily="34" charset="-122"/>
@@ -1734,14 +2317,14 @@
       </p:sp>
       <p:sp>
         <p:nvSpPr>
-          <p:cNvPr id="9" name="nhan"/>
+          <p:cNvPr id="13" name="nhan"/>
           <p:cNvSpPr txBox="1"/>
           <p:nvPr/>
         </p:nvSpPr>
         <p:spPr>
           <a:xfrm>
-            <a:off x="3406140" y="2331720"/>
-            <a:ext cx="2331720" cy="685800"/>
+            <a:off x="3520440" y="3063240"/>
+            <a:ext cx="2103120" cy="1051560"/>
           </a:xfrm>
           <a:prstGeom prst="rect">
             <a:avLst/>
@@ -1757,39 +2340,39 @@
               <a:buNone/>
             </a:pPr>
             <a:r>
-              <a:rPr lang="en-US" sz="1400" dirty="0">
+              <a:rPr lang="en-US" sz="1600" dirty="0">
                 <a:solidFill>
-                  <a:srgbClr val="1B1F2A"/>
+                  <a:srgbClr val="1A2433"/>
                 </a:solidFill>
               </a:rPr>
-              <a:t>ý kiến mở nói về wifi (120 trên 360)</a:t>
+              <a:t>ý kiến mở nói về wifi (120 trên 360 phiếu)</a:t>
             </a:r>
-            <a:endParaRPr lang="en-US" sz="1400" dirty="0"/>
+            <a:endParaRPr lang="en-US" sz="1600" dirty="0"/>
           </a:p>
         </p:txBody>
       </p:sp>
       <p:sp>
         <p:nvSpPr>
-          <p:cNvPr id="10" name="the"/>
+          <p:cNvPr id="14" name="the"/>
           <p:cNvSpPr/>
           <p:nvPr/>
         </p:nvSpPr>
         <p:spPr>
           <a:xfrm>
-            <a:off x="6080760" y="1371600"/>
-            <a:ext cx="2606040" cy="1737360"/>
+            <a:off x="6035040" y="1325880"/>
+            <a:ext cx="2560320" cy="2926080"/>
           </a:xfrm>
           <a:prstGeom prst="roundRect">
             <a:avLst>
-              <a:gd name="adj" fmla="val 5263"/>
+              <a:gd name="adj" fmla="val 2857"/>
             </a:avLst>
           </a:prstGeom>
           <a:solidFill>
-            <a:srgbClr val="EEF3F2"/>
+            <a:srgbClr val="F1F4F8"/>
           </a:solidFill>
           <a:ln w="12700">
             <a:solidFill>
-              <a:srgbClr val="EEF3F2"/>
+              <a:srgbClr val="F1F4F8"/>
             </a:solidFill>
             <a:prstDash val="solid"/>
           </a:ln>
@@ -1797,14 +2380,63 @@
       </p:sp>
       <p:sp>
         <p:nvSpPr>
-          <p:cNvPr id="11" name="so-lieu"/>
+          <p:cNvPr id="15" name="o-bieu-tuong"/>
+          <p:cNvSpPr/>
+          <p:nvPr/>
+        </p:nvSpPr>
+        <p:spPr>
+          <a:xfrm>
+            <a:off x="6263640" y="1554480"/>
+            <a:ext cx="548640" cy="548640"/>
+          </a:xfrm>
+          <a:prstGeom prst="ellipse">
+            <a:avLst/>
+          </a:prstGeom>
+          <a:solidFill>
+            <a:srgbClr val="1F4E8C"/>
+          </a:solidFill>
+          <a:ln w="12700">
+            <a:solidFill>
+              <a:srgbClr val="1F4E8C"/>
+            </a:solidFill>
+            <a:prstDash val="solid"/>
+          </a:ln>
+        </p:spPr>
+      </p:sp>
+      <p:pic>
+        <p:nvPicPr>
+          <p:cNvPr id="16" name="bieu-tuong" descr="Biểu tượng minh họa">    </p:cNvPr>
+          <p:cNvPicPr>
+            <a:picLocks noChangeAspect="1"/>
+          </p:cNvPicPr>
+          <p:nvPr/>
+        </p:nvPicPr>
+        <p:blipFill>
+          <a:blip r:embed="rId3"/>
+          <a:stretch>
+            <a:fillRect/>
+          </a:stretch>
+        </p:blipFill>
+        <p:spPr>
+          <a:xfrm>
+            <a:off x="6400800" y="1691640"/>
+            <a:ext cx="274320" cy="274320"/>
+          </a:xfrm>
+          <a:prstGeom prst="rect">
+            <a:avLst/>
+          </a:prstGeom>
+        </p:spPr>
+      </p:pic>
+      <p:sp>
+        <p:nvSpPr>
+          <p:cNvPr id="17" name="so-lieu"/>
           <p:cNvSpPr txBox="1"/>
           <p:nvPr/>
         </p:nvSpPr>
         <p:spPr>
           <a:xfrm>
-            <a:off x="6217920" y="1508760"/>
-            <a:ext cx="2331720" cy="822960"/>
+            <a:off x="6263640" y="2240280"/>
+            <a:ext cx="2103120" cy="777240"/>
           </a:xfrm>
           <a:prstGeom prst="rect">
             <a:avLst/>
@@ -1822,7 +2454,7 @@
             <a:r>
               <a:rPr lang="en-US" sz="4000" b="1" dirty="0">
                 <a:solidFill>
-                  <a:srgbClr val="0F6E6E"/>
+                  <a:srgbClr val="1F4E8C"/>
                 </a:solidFill>
                 <a:latin typeface="Cambria" pitchFamily="34" charset="0"/>
                 <a:ea typeface="Cambria" pitchFamily="34" charset="-122"/>
@@ -1836,14 +2468,14 @@
       </p:sp>
       <p:sp>
         <p:nvSpPr>
-          <p:cNvPr id="12" name="nhan"/>
+          <p:cNvPr id="18" name="nhan"/>
           <p:cNvSpPr txBox="1"/>
           <p:nvPr/>
         </p:nvSpPr>
         <p:spPr>
           <a:xfrm>
-            <a:off x="6217920" y="2331720"/>
-            <a:ext cx="2331720" cy="685800"/>
+            <a:off x="6263640" y="3063240"/>
+            <a:ext cx="2103120" cy="1051560"/>
           </a:xfrm>
           <a:prstGeom prst="rect">
             <a:avLst/>
@@ -1859,27 +2491,27 @@
               <a:buNone/>
             </a:pPr>
             <a:r>
-              <a:rPr lang="en-US" sz="1400" dirty="0">
+              <a:rPr lang="en-US" sz="1600" dirty="0">
                 <a:solidFill>
-                  <a:srgbClr val="1B1F2A"/>
+                  <a:srgbClr val="1A2433"/>
                 </a:solidFill>
               </a:rPr>
               <a:t>triệu đồng, chi phí phương án A theo báo giá</a:t>
             </a:r>
-            <a:endParaRPr lang="en-US" sz="1400" dirty="0"/>
+            <a:endParaRPr lang="en-US" sz="1600" dirty="0"/>
           </a:p>
         </p:txBody>
       </p:sp>
       <p:sp>
         <p:nvSpPr>
-          <p:cNvPr id="13" name="nguon"/>
+          <p:cNvPr id="19" name="nguon"/>
           <p:cNvSpPr txBox="1"/>
           <p:nvPr/>
         </p:nvSpPr>
         <p:spPr>
           <a:xfrm>
-            <a:off x="457200" y="4617720"/>
-            <a:ext cx="8229600" cy="320040"/>
+            <a:off x="548640" y="4416552"/>
+            <a:ext cx="8046720" cy="274320"/>
           </a:xfrm>
           <a:prstGeom prst="rect">
             <a:avLst/>
@@ -1897,12 +2529,57 @@
             <a:r>
               <a:rPr lang="en-US" sz="1100" i="1" dirty="0">
                 <a:solidFill>
-                  <a:srgbClr val="5A6666"/>
+                  <a:srgbClr val="6B7A90"/>
                 </a:solidFill>
               </a:rPr>
               <a:t>Nguồn: báo cáo khảo sát sinh viên học kỳ 1 năm học 2026–2027; báo giá NCC-01 (mẫu)</a:t>
             </a:r>
             <a:endParaRPr lang="en-US" sz="1100" dirty="0"/>
+          </a:p>
+        </p:txBody>
+      </p:sp>
+      <p:sp>
+        <p:nvSpPr>
+          <p:cNvPr id="25" name="Slide Number Placeholder 0"/>
+          <p:cNvSpPr>
+            <a:spLocks noGrp="1"/>
+          </p:cNvSpPr>
+          <p:nvPr>
+            <p:ph type="sldNum" sz="quarter" idx="4294967295"/>
+          </p:nvPr>
+        </p:nvSpPr>
+        <p:spPr>
+          <a:xfrm>
+            <a:off x="8138160" y="4727448"/>
+            <a:ext cx="457200" cy="274320"/>
+          </a:xfrm>
+          <a:prstGeom prst="rect">
+            <a:avLst/>
+          </a:prstGeom>
+          <a:extLst>
+            <a:ext uri="{C572A759-6A51-4108-AA02-DFA0A04FC94B}">
+              <ma14:wrappingTextBoxFlag xmlns:ma14="http://schemas.microsoft.com/office/mac/drawingml/2011/main" val="0"/>
+            </a:ext>
+          </a:extLst>
+        </p:spPr>
+        <p:txBody>
+          <a:bodyPr/>
+          <a:lstStyle>
+            <a:lvl1pPr>
+              <a:defRPr sz="1100">
+                <a:solidFill>
+                  <a:srgbClr val="6B7A90"/>
+                </a:solidFill>
+              </a:defRPr>
+            </a:lvl1pPr>
+          </a:lstStyle>
+          <a:p>
+            <a:pPr algn="r"/>
+            <a:fld id="{F7021451-1387-4CA6-816F-3879F97B5CBC}" type="slidenum">
+              <a:rPr b="0" lang="en-US"/>
+              <a:t>2</a:t>
+            </a:fld>
+            <a:endParaRPr lang="en-US"/>
           </a:p>
         </p:txBody>
       </p:sp>
@@ -1941,8 +2618,8 @@
         </p:nvSpPr>
         <p:spPr>
           <a:xfrm>
-            <a:off x="457200" y="274320"/>
-            <a:ext cx="8229600" cy="868680"/>
+            <a:off x="548640" y="274320"/>
+            <a:ext cx="8046720" cy="868680"/>
           </a:xfrm>
           <a:prstGeom prst="rect">
             <a:avLst/>
@@ -1960,10 +2637,10 @@
             <a:r>
               <a:rPr lang="en-US" sz="2800" b="1" dirty="0">
                 <a:solidFill>
-                  <a:srgbClr val="0F3D3E"/>
+                  <a:srgbClr val="0B2A4A"/>
                 </a:solidFill>
               </a:rPr>
-              <a:t>Ba phương án, nhưng mới đủ số liệu cho hai</a:t>
+              <a:t>Ba phương án, nhưng mới đủ số liệu để so sánh hai</a:t>
             </a:r>
             <a:endParaRPr lang="en-US" sz="2800" dirty="0"/>
           </a:p>
@@ -1984,18 +2661,18 @@
           </p:nvPr>
         </p:nvGraphicFramePr>
         <p:xfrm>
-          <a:off x="457200" y="1280160"/>
-          <a:ext cx="8229600" cy="914400"/>
+          <a:off x="548640" y="1280160"/>
+          <a:ext cx="8046720" cy="914400"/>
         </p:xfrm>
         <a:graphic>
           <a:graphicData uri="http://schemas.openxmlformats.org/drawingml/2006/table">
             <a:tbl>
               <a:tblPr/>
               <a:tblGrid>
-                <a:gridCol w="1645920"/>
-                <a:gridCol w="2194560"/>
-                <a:gridCol w="2194560"/>
-                <a:gridCol w="2194560"/>
+                <a:gridCol w="1737360"/>
+                <a:gridCol w="2103120"/>
+                <a:gridCol w="2103120"/>
+                <a:gridCol w="2103120"/>
               </a:tblGrid>
               <a:tr h="411480">
                 <a:tc>
@@ -2020,7 +2697,7 @@
                   <a:tcPr marL="91440" marR="91440" marT="54864" marB="54864" anchor="ctr">
                     <a:lnL w="9525" cap="flat" cmpd="sng" algn="ctr">
                       <a:solidFill>
-                        <a:srgbClr val="B8C4C3"/>
+                        <a:srgbClr val="D5DCE6"/>
                       </a:solidFill>
                       <a:prstDash val="solid"/>
                       <a:round/>
@@ -2029,7 +2706,7 @@
                     </a:lnL>
                     <a:lnR w="9525" cap="flat" cmpd="sng" algn="ctr">
                       <a:solidFill>
-                        <a:srgbClr val="B8C4C3"/>
+                        <a:srgbClr val="D5DCE6"/>
                       </a:solidFill>
                       <a:prstDash val="solid"/>
                       <a:round/>
@@ -2038,7 +2715,7 @@
                     </a:lnR>
                     <a:lnT w="9525" cap="flat" cmpd="sng" algn="ctr">
                       <a:solidFill>
-                        <a:srgbClr val="B8C4C3"/>
+                        <a:srgbClr val="D5DCE6"/>
                       </a:solidFill>
                       <a:prstDash val="solid"/>
                       <a:round/>
@@ -2047,7 +2724,7 @@
                     </a:lnT>
                     <a:lnB w="9525" cap="flat" cmpd="sng" algn="ctr">
                       <a:solidFill>
-                        <a:srgbClr val="B8C4C3"/>
+                        <a:srgbClr val="D5DCE6"/>
                       </a:solidFill>
                       <a:prstDash val="solid"/>
                       <a:round/>
@@ -2055,7 +2732,7 @@
                       <a:tailEnd type="none" w="med" len="med"/>
                     </a:lnB>
                     <a:solidFill>
-                      <a:srgbClr val="0F3D3E"/>
+                      <a:srgbClr val="0B2A4A"/>
                     </a:solidFill>
                   </a:tcPr>
                 </a:tc>
@@ -2081,7 +2758,7 @@
                   <a:tcPr marL="91440" marR="91440" marT="54864" marB="54864" anchor="ctr">
                     <a:lnL w="9525" cap="flat" cmpd="sng" algn="ctr">
                       <a:solidFill>
-                        <a:srgbClr val="B8C4C3"/>
+                        <a:srgbClr val="D5DCE6"/>
                       </a:solidFill>
                       <a:prstDash val="solid"/>
                       <a:round/>
@@ -2090,7 +2767,7 @@
                     </a:lnL>
                     <a:lnR w="9525" cap="flat" cmpd="sng" algn="ctr">
                       <a:solidFill>
-                        <a:srgbClr val="B8C4C3"/>
+                        <a:srgbClr val="D5DCE6"/>
                       </a:solidFill>
                       <a:prstDash val="solid"/>
                       <a:round/>
@@ -2099,7 +2776,7 @@
                     </a:lnR>
                     <a:lnT w="9525" cap="flat" cmpd="sng" algn="ctr">
                       <a:solidFill>
-                        <a:srgbClr val="B8C4C3"/>
+                        <a:srgbClr val="D5DCE6"/>
                       </a:solidFill>
                       <a:prstDash val="solid"/>
                       <a:round/>
@@ -2108,7 +2785,7 @@
                     </a:lnT>
                     <a:lnB w="9525" cap="flat" cmpd="sng" algn="ctr">
                       <a:solidFill>
-                        <a:srgbClr val="B8C4C3"/>
+                        <a:srgbClr val="D5DCE6"/>
                       </a:solidFill>
                       <a:prstDash val="solid"/>
                       <a:round/>
@@ -2116,7 +2793,7 @@
                       <a:tailEnd type="none" w="med" len="med"/>
                     </a:lnB>
                     <a:solidFill>
-                      <a:srgbClr val="0F3D3E"/>
+                      <a:srgbClr val="0B2A4A"/>
                     </a:solidFill>
                   </a:tcPr>
                 </a:tc>
@@ -2142,7 +2819,7 @@
                   <a:tcPr marL="91440" marR="91440" marT="54864" marB="54864" anchor="ctr">
                     <a:lnL w="9525" cap="flat" cmpd="sng" algn="ctr">
                       <a:solidFill>
-                        <a:srgbClr val="B8C4C3"/>
+                        <a:srgbClr val="D5DCE6"/>
                       </a:solidFill>
                       <a:prstDash val="solid"/>
                       <a:round/>
@@ -2151,7 +2828,7 @@
                     </a:lnL>
                     <a:lnR w="9525" cap="flat" cmpd="sng" algn="ctr">
                       <a:solidFill>
-                        <a:srgbClr val="B8C4C3"/>
+                        <a:srgbClr val="D5DCE6"/>
                       </a:solidFill>
                       <a:prstDash val="solid"/>
                       <a:round/>
@@ -2160,7 +2837,7 @@
                     </a:lnR>
                     <a:lnT w="9525" cap="flat" cmpd="sng" algn="ctr">
                       <a:solidFill>
-                        <a:srgbClr val="B8C4C3"/>
+                        <a:srgbClr val="D5DCE6"/>
                       </a:solidFill>
                       <a:prstDash val="solid"/>
                       <a:round/>
@@ -2169,7 +2846,7 @@
                     </a:lnT>
                     <a:lnB w="9525" cap="flat" cmpd="sng" algn="ctr">
                       <a:solidFill>
-                        <a:srgbClr val="B8C4C3"/>
+                        <a:srgbClr val="D5DCE6"/>
                       </a:solidFill>
                       <a:prstDash val="solid"/>
                       <a:round/>
@@ -2177,7 +2854,7 @@
                       <a:tailEnd type="none" w="med" len="med"/>
                     </a:lnB>
                     <a:solidFill>
-                      <a:srgbClr val="0F3D3E"/>
+                      <a:srgbClr val="0B2A4A"/>
                     </a:solidFill>
                   </a:tcPr>
                 </a:tc>
@@ -2203,7 +2880,7 @@
                   <a:tcPr marL="91440" marR="91440" marT="54864" marB="54864" anchor="ctr">
                     <a:lnL w="9525" cap="flat" cmpd="sng" algn="ctr">
                       <a:solidFill>
-                        <a:srgbClr val="B8C4C3"/>
+                        <a:srgbClr val="D5DCE6"/>
                       </a:solidFill>
                       <a:prstDash val="solid"/>
                       <a:round/>
@@ -2212,7 +2889,7 @@
                     </a:lnL>
                     <a:lnR w="9525" cap="flat" cmpd="sng" algn="ctr">
                       <a:solidFill>
-                        <a:srgbClr val="B8C4C3"/>
+                        <a:srgbClr val="D5DCE6"/>
                       </a:solidFill>
                       <a:prstDash val="solid"/>
                       <a:round/>
@@ -2221,7 +2898,7 @@
                     </a:lnR>
                     <a:lnT w="9525" cap="flat" cmpd="sng" algn="ctr">
                       <a:solidFill>
-                        <a:srgbClr val="B8C4C3"/>
+                        <a:srgbClr val="D5DCE6"/>
                       </a:solidFill>
                       <a:prstDash val="solid"/>
                       <a:round/>
@@ -2230,7 +2907,7 @@
                     </a:lnT>
                     <a:lnB w="9525" cap="flat" cmpd="sng" algn="ctr">
                       <a:solidFill>
-                        <a:srgbClr val="B8C4C3"/>
+                        <a:srgbClr val="D5DCE6"/>
                       </a:solidFill>
                       <a:prstDash val="solid"/>
                       <a:round/>
@@ -2238,7 +2915,7 @@
                       <a:tailEnd type="none" w="med" len="med"/>
                     </a:lnB>
                     <a:solidFill>
-                      <a:srgbClr val="0F3D3E"/>
+                      <a:srgbClr val="0B2A4A"/>
                     </a:solidFill>
                   </a:tcPr>
                 </a:tc>
@@ -2255,7 +2932,7 @@
                       <a:r>
                         <a:rPr lang="en-US" sz="1400" b="1" dirty="0">
                           <a:solidFill>
-                            <a:srgbClr val="1B1F2A"/>
+                            <a:srgbClr val="1A2433"/>
                           </a:solidFill>
                         </a:rPr>
                         <a:t>Chi phí</a:t>
@@ -2266,7 +2943,7 @@
                   <a:tcPr marL="91440" marR="91440" marT="54864" marB="54864" anchor="ctr">
                     <a:lnL w="9525" cap="flat" cmpd="sng" algn="ctr">
                       <a:solidFill>
-                        <a:srgbClr val="B8C4C3"/>
+                        <a:srgbClr val="D5DCE6"/>
                       </a:solidFill>
                       <a:prstDash val="solid"/>
                       <a:round/>
@@ -2275,7 +2952,7 @@
                     </a:lnL>
                     <a:lnR w="9525" cap="flat" cmpd="sng" algn="ctr">
                       <a:solidFill>
-                        <a:srgbClr val="B8C4C3"/>
+                        <a:srgbClr val="D5DCE6"/>
                       </a:solidFill>
                       <a:prstDash val="solid"/>
                       <a:round/>
@@ -2284,7 +2961,7 @@
                     </a:lnR>
                     <a:lnT w="9525" cap="flat" cmpd="sng" algn="ctr">
                       <a:solidFill>
-                        <a:srgbClr val="B8C4C3"/>
+                        <a:srgbClr val="D5DCE6"/>
                       </a:solidFill>
                       <a:prstDash val="solid"/>
                       <a:round/>
@@ -2293,13 +2970,16 @@
                     </a:lnT>
                     <a:lnB w="9525" cap="flat" cmpd="sng" algn="ctr">
                       <a:solidFill>
-                        <a:srgbClr val="B8C4C3"/>
+                        <a:srgbClr val="D5DCE6"/>
                       </a:solidFill>
                       <a:prstDash val="solid"/>
                       <a:round/>
                       <a:headEnd type="none" w="med" len="med"/>
                       <a:tailEnd type="none" w="med" len="med"/>
                     </a:lnB>
+                    <a:solidFill>
+                      <a:srgbClr val="FFFFFF"/>
+                    </a:solidFill>
                   </a:tcPr>
                 </a:tc>
                 <a:tc>
@@ -2313,7 +2993,7 @@
                       <a:r>
                         <a:rPr lang="en-US" sz="1400" dirty="0">
                           <a:solidFill>
-                            <a:srgbClr val="1B1F2A"/>
+                            <a:srgbClr val="1A2433"/>
                           </a:solidFill>
                         </a:rPr>
                         <a:t>1.200 triệu (NCC-01)</a:t>
@@ -2324,7 +3004,7 @@
                   <a:tcPr marL="91440" marR="91440" marT="54864" marB="54864" anchor="ctr">
                     <a:lnL w="9525" cap="flat" cmpd="sng" algn="ctr">
                       <a:solidFill>
-                        <a:srgbClr val="B8C4C3"/>
+                        <a:srgbClr val="D5DCE6"/>
                       </a:solidFill>
                       <a:prstDash val="solid"/>
                       <a:round/>
@@ -2333,7 +3013,7 @@
                     </a:lnL>
                     <a:lnR w="9525" cap="flat" cmpd="sng" algn="ctr">
                       <a:solidFill>
-                        <a:srgbClr val="B8C4C3"/>
+                        <a:srgbClr val="D5DCE6"/>
                       </a:solidFill>
                       <a:prstDash val="solid"/>
                       <a:round/>
@@ -2342,7 +3022,7 @@
                     </a:lnR>
                     <a:lnT w="9525" cap="flat" cmpd="sng" algn="ctr">
                       <a:solidFill>
-                        <a:srgbClr val="B8C4C3"/>
+                        <a:srgbClr val="D5DCE6"/>
                       </a:solidFill>
                       <a:prstDash val="solid"/>
                       <a:round/>
@@ -2351,13 +3031,16 @@
                     </a:lnT>
                     <a:lnB w="9525" cap="flat" cmpd="sng" algn="ctr">
                       <a:solidFill>
-                        <a:srgbClr val="B8C4C3"/>
+                        <a:srgbClr val="D5DCE6"/>
                       </a:solidFill>
                       <a:prstDash val="solid"/>
                       <a:round/>
                       <a:headEnd type="none" w="med" len="med"/>
                       <a:tailEnd type="none" w="med" len="med"/>
                     </a:lnB>
+                    <a:solidFill>
+                      <a:srgbClr val="FFFFFF"/>
+                    </a:solidFill>
                   </a:tcPr>
                 </a:tc>
                 <a:tc>
@@ -2371,7 +3054,7 @@
                       <a:r>
                         <a:rPr lang="en-US" sz="1400" dirty="0">
                           <a:solidFill>
-                            <a:srgbClr val="1B1F2A"/>
+                            <a:srgbClr val="1A2433"/>
                           </a:solidFill>
                         </a:rPr>
                         <a:t>700 triệu (giai đoạn 1) (NCC-01)</a:t>
@@ -2382,7 +3065,7 @@
                   <a:tcPr marL="91440" marR="91440" marT="54864" marB="54864" anchor="ctr">
                     <a:lnL w="9525" cap="flat" cmpd="sng" algn="ctr">
                       <a:solidFill>
-                        <a:srgbClr val="B8C4C3"/>
+                        <a:srgbClr val="D5DCE6"/>
                       </a:solidFill>
                       <a:prstDash val="solid"/>
                       <a:round/>
@@ -2391,7 +3074,7 @@
                     </a:lnL>
                     <a:lnR w="9525" cap="flat" cmpd="sng" algn="ctr">
                       <a:solidFill>
-                        <a:srgbClr val="B8C4C3"/>
+                        <a:srgbClr val="D5DCE6"/>
                       </a:solidFill>
                       <a:prstDash val="solid"/>
                       <a:round/>
@@ -2400,7 +3083,7 @@
                     </a:lnR>
                     <a:lnT w="9525" cap="flat" cmpd="sng" algn="ctr">
                       <a:solidFill>
-                        <a:srgbClr val="B8C4C3"/>
+                        <a:srgbClr val="D5DCE6"/>
                       </a:solidFill>
                       <a:prstDash val="solid"/>
                       <a:round/>
@@ -2409,13 +3092,16 @@
                     </a:lnT>
                     <a:lnB w="9525" cap="flat" cmpd="sng" algn="ctr">
                       <a:solidFill>
-                        <a:srgbClr val="B8C4C3"/>
+                        <a:srgbClr val="D5DCE6"/>
                       </a:solidFill>
                       <a:prstDash val="solid"/>
                       <a:round/>
                       <a:headEnd type="none" w="med" len="med"/>
                       <a:tailEnd type="none" w="med" len="med"/>
                     </a:lnB>
+                    <a:solidFill>
+                      <a:srgbClr val="FFFFFF"/>
+                    </a:solidFill>
                   </a:tcPr>
                 </a:tc>
                 <a:tc>
@@ -2429,7 +3115,7 @@
                       <a:r>
                         <a:rPr lang="en-US" sz="1400" dirty="0">
                           <a:solidFill>
-                            <a:srgbClr val="1B1F2A"/>
+                            <a:srgbClr val="1A2433"/>
                           </a:solidFill>
                         </a:rPr>
                         <a:t>Chưa có số liệu</a:t>
@@ -2440,7 +3126,7 @@
                   <a:tcPr marL="91440" marR="91440" marT="54864" marB="54864" anchor="ctr">
                     <a:lnL w="9525" cap="flat" cmpd="sng" algn="ctr">
                       <a:solidFill>
-                        <a:srgbClr val="B8C4C3"/>
+                        <a:srgbClr val="D5DCE6"/>
                       </a:solidFill>
                       <a:prstDash val="solid"/>
                       <a:round/>
@@ -2449,7 +3135,7 @@
                     </a:lnL>
                     <a:lnR w="9525" cap="flat" cmpd="sng" algn="ctr">
                       <a:solidFill>
-                        <a:srgbClr val="B8C4C3"/>
+                        <a:srgbClr val="D5DCE6"/>
                       </a:solidFill>
                       <a:prstDash val="solid"/>
                       <a:round/>
@@ -2458,7 +3144,7 @@
                     </a:lnR>
                     <a:lnT w="9525" cap="flat" cmpd="sng" algn="ctr">
                       <a:solidFill>
-                        <a:srgbClr val="B8C4C3"/>
+                        <a:srgbClr val="D5DCE6"/>
                       </a:solidFill>
                       <a:prstDash val="solid"/>
                       <a:round/>
@@ -2467,13 +3153,16 @@
                     </a:lnT>
                     <a:lnB w="9525" cap="flat" cmpd="sng" algn="ctr">
                       <a:solidFill>
-                        <a:srgbClr val="B8C4C3"/>
+                        <a:srgbClr val="D5DCE6"/>
                       </a:solidFill>
                       <a:prstDash val="solid"/>
                       <a:round/>
                       <a:headEnd type="none" w="med" len="med"/>
                       <a:tailEnd type="none" w="med" len="med"/>
                     </a:lnB>
+                    <a:solidFill>
+                      <a:srgbClr val="FFFFFF"/>
+                    </a:solidFill>
                   </a:tcPr>
                 </a:tc>
               </a:tr>
@@ -2489,7 +3178,7 @@
                       <a:r>
                         <a:rPr lang="en-US" sz="1400" b="1" dirty="0">
                           <a:solidFill>
-                            <a:srgbClr val="1B1F2A"/>
+                            <a:srgbClr val="1A2433"/>
                           </a:solidFill>
                         </a:rPr>
                         <a:t>Thời gian</a:t>
@@ -2500,7 +3189,7 @@
                   <a:tcPr marL="91440" marR="91440" marT="54864" marB="54864" anchor="ctr">
                     <a:lnL w="9525" cap="flat" cmpd="sng" algn="ctr">
                       <a:solidFill>
-                        <a:srgbClr val="B8C4C3"/>
+                        <a:srgbClr val="D5DCE6"/>
                       </a:solidFill>
                       <a:prstDash val="solid"/>
                       <a:round/>
@@ -2509,7 +3198,7 @@
                     </a:lnL>
                     <a:lnR w="9525" cap="flat" cmpd="sng" algn="ctr">
                       <a:solidFill>
-                        <a:srgbClr val="B8C4C3"/>
+                        <a:srgbClr val="D5DCE6"/>
                       </a:solidFill>
                       <a:prstDash val="solid"/>
                       <a:round/>
@@ -2518,7 +3207,7 @@
                     </a:lnR>
                     <a:lnT w="9525" cap="flat" cmpd="sng" algn="ctr">
                       <a:solidFill>
-                        <a:srgbClr val="B8C4C3"/>
+                        <a:srgbClr val="D5DCE6"/>
                       </a:solidFill>
                       <a:prstDash val="solid"/>
                       <a:round/>
@@ -2527,13 +3216,16 @@
                     </a:lnT>
                     <a:lnB w="9525" cap="flat" cmpd="sng" algn="ctr">
                       <a:solidFill>
-                        <a:srgbClr val="B8C4C3"/>
+                        <a:srgbClr val="D5DCE6"/>
                       </a:solidFill>
                       <a:prstDash val="solid"/>
                       <a:round/>
                       <a:headEnd type="none" w="med" len="med"/>
                       <a:tailEnd type="none" w="med" len="med"/>
                     </a:lnB>
+                    <a:solidFill>
+                      <a:srgbClr val="F1F4F8"/>
+                    </a:solidFill>
                   </a:tcPr>
                 </a:tc>
                 <a:tc>
@@ -2547,7 +3239,7 @@
                       <a:r>
                         <a:rPr lang="en-US" sz="1400" dirty="0">
                           <a:solidFill>
-                            <a:srgbClr val="1B1F2A"/>
+                            <a:srgbClr val="1A2433"/>
                           </a:solidFill>
                         </a:rPr>
                         <a:t>4 tháng (NCC-01)</a:t>
@@ -2558,7 +3250,7 @@
                   <a:tcPr marL="91440" marR="91440" marT="54864" marB="54864" anchor="ctr">
                     <a:lnL w="9525" cap="flat" cmpd="sng" algn="ctr">
                       <a:solidFill>
-                        <a:srgbClr val="B8C4C3"/>
+                        <a:srgbClr val="D5DCE6"/>
                       </a:solidFill>
                       <a:prstDash val="solid"/>
                       <a:round/>
@@ -2567,7 +3259,7 @@
                     </a:lnL>
                     <a:lnR w="9525" cap="flat" cmpd="sng" algn="ctr">
                       <a:solidFill>
-                        <a:srgbClr val="B8C4C3"/>
+                        <a:srgbClr val="D5DCE6"/>
                       </a:solidFill>
                       <a:prstDash val="solid"/>
                       <a:round/>
@@ -2576,7 +3268,7 @@
                     </a:lnR>
                     <a:lnT w="9525" cap="flat" cmpd="sng" algn="ctr">
                       <a:solidFill>
-                        <a:srgbClr val="B8C4C3"/>
+                        <a:srgbClr val="D5DCE6"/>
                       </a:solidFill>
                       <a:prstDash val="solid"/>
                       <a:round/>
@@ -2585,13 +3277,16 @@
                     </a:lnT>
                     <a:lnB w="9525" cap="flat" cmpd="sng" algn="ctr">
                       <a:solidFill>
-                        <a:srgbClr val="B8C4C3"/>
+                        <a:srgbClr val="D5DCE6"/>
                       </a:solidFill>
                       <a:prstDash val="solid"/>
                       <a:round/>
                       <a:headEnd type="none" w="med" len="med"/>
                       <a:tailEnd type="none" w="med" len="med"/>
                     </a:lnB>
+                    <a:solidFill>
+                      <a:srgbClr val="F1F4F8"/>
+                    </a:solidFill>
                   </a:tcPr>
                 </a:tc>
                 <a:tc>
@@ -2605,7 +3300,7 @@
                       <a:r>
                         <a:rPr lang="en-US" sz="1400" dirty="0">
                           <a:solidFill>
-                            <a:srgbClr val="1B1F2A"/>
+                            <a:srgbClr val="1A2433"/>
                           </a:solidFill>
                         </a:rPr>
                         <a:t>2 tháng + 3 tháng (NCC-01)</a:t>
@@ -2616,7 +3311,7 @@
                   <a:tcPr marL="91440" marR="91440" marT="54864" marB="54864" anchor="ctr">
                     <a:lnL w="9525" cap="flat" cmpd="sng" algn="ctr">
                       <a:solidFill>
-                        <a:srgbClr val="B8C4C3"/>
+                        <a:srgbClr val="D5DCE6"/>
                       </a:solidFill>
                       <a:prstDash val="solid"/>
                       <a:round/>
@@ -2625,7 +3320,7 @@
                     </a:lnL>
                     <a:lnR w="9525" cap="flat" cmpd="sng" algn="ctr">
                       <a:solidFill>
-                        <a:srgbClr val="B8C4C3"/>
+                        <a:srgbClr val="D5DCE6"/>
                       </a:solidFill>
                       <a:prstDash val="solid"/>
                       <a:round/>
@@ -2634,7 +3329,7 @@
                     </a:lnR>
                     <a:lnT w="9525" cap="flat" cmpd="sng" algn="ctr">
                       <a:solidFill>
-                        <a:srgbClr val="B8C4C3"/>
+                        <a:srgbClr val="D5DCE6"/>
                       </a:solidFill>
                       <a:prstDash val="solid"/>
                       <a:round/>
@@ -2643,13 +3338,16 @@
                     </a:lnT>
                     <a:lnB w="9525" cap="flat" cmpd="sng" algn="ctr">
                       <a:solidFill>
-                        <a:srgbClr val="B8C4C3"/>
+                        <a:srgbClr val="D5DCE6"/>
                       </a:solidFill>
                       <a:prstDash val="solid"/>
                       <a:round/>
                       <a:headEnd type="none" w="med" len="med"/>
                       <a:tailEnd type="none" w="med" len="med"/>
                     </a:lnB>
+                    <a:solidFill>
+                      <a:srgbClr val="F1F4F8"/>
+                    </a:solidFill>
                   </a:tcPr>
                 </a:tc>
                 <a:tc>
@@ -2663,7 +3361,7 @@
                       <a:r>
                         <a:rPr lang="en-US" sz="1400" dirty="0">
                           <a:solidFill>
-                            <a:srgbClr val="1B1F2A"/>
+                            <a:srgbClr val="1A2433"/>
                           </a:solidFill>
                         </a:rPr>
                         <a:t>Chưa có báo giá</a:t>
@@ -2674,7 +3372,7 @@
                   <a:tcPr marL="91440" marR="91440" marT="54864" marB="54864" anchor="ctr">
                     <a:lnL w="9525" cap="flat" cmpd="sng" algn="ctr">
                       <a:solidFill>
-                        <a:srgbClr val="B8C4C3"/>
+                        <a:srgbClr val="D5DCE6"/>
                       </a:solidFill>
                       <a:prstDash val="solid"/>
                       <a:round/>
@@ -2683,7 +3381,7 @@
                     </a:lnL>
                     <a:lnR w="9525" cap="flat" cmpd="sng" algn="ctr">
                       <a:solidFill>
-                        <a:srgbClr val="B8C4C3"/>
+                        <a:srgbClr val="D5DCE6"/>
                       </a:solidFill>
                       <a:prstDash val="solid"/>
                       <a:round/>
@@ -2692,7 +3390,7 @@
                     </a:lnR>
                     <a:lnT w="9525" cap="flat" cmpd="sng" algn="ctr">
                       <a:solidFill>
-                        <a:srgbClr val="B8C4C3"/>
+                        <a:srgbClr val="D5DCE6"/>
                       </a:solidFill>
                       <a:prstDash val="solid"/>
                       <a:round/>
@@ -2701,13 +3399,16 @@
                     </a:lnT>
                     <a:lnB w="9525" cap="flat" cmpd="sng" algn="ctr">
                       <a:solidFill>
-                        <a:srgbClr val="B8C4C3"/>
+                        <a:srgbClr val="D5DCE6"/>
                       </a:solidFill>
                       <a:prstDash val="solid"/>
                       <a:round/>
                       <a:headEnd type="none" w="med" len="med"/>
                       <a:tailEnd type="none" w="med" len="med"/>
                     </a:lnB>
+                    <a:solidFill>
+                      <a:srgbClr val="F1F4F8"/>
+                    </a:solidFill>
                   </a:tcPr>
                 </a:tc>
               </a:tr>
@@ -2723,7 +3424,7 @@
                       <a:r>
                         <a:rPr lang="en-US" sz="1400" b="1" dirty="0">
                           <a:solidFill>
-                            <a:srgbClr val="1B1F2A"/>
+                            <a:srgbClr val="1A2433"/>
                           </a:solidFill>
                         </a:rPr>
                         <a:t>Rủi ro</a:t>
@@ -2734,7 +3435,7 @@
                   <a:tcPr marL="91440" marR="91440" marT="54864" marB="54864" anchor="ctr">
                     <a:lnL w="9525" cap="flat" cmpd="sng" algn="ctr">
                       <a:solidFill>
-                        <a:srgbClr val="B8C4C3"/>
+                        <a:srgbClr val="D5DCE6"/>
                       </a:solidFill>
                       <a:prstDash val="solid"/>
                       <a:round/>
@@ -2743,7 +3444,7 @@
                     </a:lnL>
                     <a:lnR w="9525" cap="flat" cmpd="sng" algn="ctr">
                       <a:solidFill>
-                        <a:srgbClr val="B8C4C3"/>
+                        <a:srgbClr val="D5DCE6"/>
                       </a:solidFill>
                       <a:prstDash val="solid"/>
                       <a:round/>
@@ -2752,7 +3453,7 @@
                     </a:lnR>
                     <a:lnT w="9525" cap="flat" cmpd="sng" algn="ctr">
                       <a:solidFill>
-                        <a:srgbClr val="B8C4C3"/>
+                        <a:srgbClr val="D5DCE6"/>
                       </a:solidFill>
                       <a:prstDash val="solid"/>
                       <a:round/>
@@ -2761,13 +3462,16 @@
                     </a:lnT>
                     <a:lnB w="9525" cap="flat" cmpd="sng" algn="ctr">
                       <a:solidFill>
-                        <a:srgbClr val="B8C4C3"/>
+                        <a:srgbClr val="D5DCE6"/>
                       </a:solidFill>
                       <a:prstDash val="solid"/>
                       <a:round/>
                       <a:headEnd type="none" w="med" len="med"/>
                       <a:tailEnd type="none" w="med" len="med"/>
                     </a:lnB>
+                    <a:solidFill>
+                      <a:srgbClr val="FFFFFF"/>
+                    </a:solidFill>
                   </a:tcPr>
                 </a:tc>
                 <a:tc>
@@ -2781,7 +3485,7 @@
                       <a:r>
                         <a:rPr lang="en-US" sz="1400" dirty="0">
                           <a:solidFill>
-                            <a:srgbClr val="1B1F2A"/>
+                            <a:srgbClr val="1A2433"/>
                           </a:solidFill>
                         </a:rPr>
                         <a:t>Gián đoạn lịch học (P. Đào tạo)</a:t>
@@ -2792,7 +3496,7 @@
                   <a:tcPr marL="91440" marR="91440" marT="54864" marB="54864" anchor="ctr">
                     <a:lnL w="9525" cap="flat" cmpd="sng" algn="ctr">
                       <a:solidFill>
-                        <a:srgbClr val="B8C4C3"/>
+                        <a:srgbClr val="D5DCE6"/>
                       </a:solidFill>
                       <a:prstDash val="solid"/>
                       <a:round/>
@@ -2801,7 +3505,7 @@
                     </a:lnL>
                     <a:lnR w="9525" cap="flat" cmpd="sng" algn="ctr">
                       <a:solidFill>
-                        <a:srgbClr val="B8C4C3"/>
+                        <a:srgbClr val="D5DCE6"/>
                       </a:solidFill>
                       <a:prstDash val="solid"/>
                       <a:round/>
@@ -2810,7 +3514,7 @@
                     </a:lnR>
                     <a:lnT w="9525" cap="flat" cmpd="sng" algn="ctr">
                       <a:solidFill>
-                        <a:srgbClr val="B8C4C3"/>
+                        <a:srgbClr val="D5DCE6"/>
                       </a:solidFill>
                       <a:prstDash val="solid"/>
                       <a:round/>
@@ -2819,13 +3523,16 @@
                     </a:lnT>
                     <a:lnB w="9525" cap="flat" cmpd="sng" algn="ctr">
                       <a:solidFill>
-                        <a:srgbClr val="B8C4C3"/>
+                        <a:srgbClr val="D5DCE6"/>
                       </a:solidFill>
                       <a:prstDash val="solid"/>
                       <a:round/>
                       <a:headEnd type="none" w="med" len="med"/>
                       <a:tailEnd type="none" w="med" len="med"/>
                     </a:lnB>
+                    <a:solidFill>
+                      <a:srgbClr val="FFFFFF"/>
+                    </a:solidFill>
                   </a:tcPr>
                 </a:tc>
                 <a:tc>
@@ -2839,7 +3546,7 @@
                       <a:r>
                         <a:rPr lang="en-US" sz="1400" dirty="0">
                           <a:solidFill>
-                            <a:srgbClr val="1B1F2A"/>
+                            <a:srgbClr val="1A2433"/>
                           </a:solidFill>
                         </a:rPr>
                         <a:t>Giai đoạn 2 chưa có vốn (P. Tài chính)</a:t>
@@ -2850,7 +3557,7 @@
                   <a:tcPr marL="91440" marR="91440" marT="54864" marB="54864" anchor="ctr">
                     <a:lnL w="9525" cap="flat" cmpd="sng" algn="ctr">
                       <a:solidFill>
-                        <a:srgbClr val="B8C4C3"/>
+                        <a:srgbClr val="D5DCE6"/>
                       </a:solidFill>
                       <a:prstDash val="solid"/>
                       <a:round/>
@@ -2859,7 +3566,7 @@
                     </a:lnL>
                     <a:lnR w="9525" cap="flat" cmpd="sng" algn="ctr">
                       <a:solidFill>
-                        <a:srgbClr val="B8C4C3"/>
+                        <a:srgbClr val="D5DCE6"/>
                       </a:solidFill>
                       <a:prstDash val="solid"/>
                       <a:round/>
@@ -2868,7 +3575,7 @@
                     </a:lnR>
                     <a:lnT w="9525" cap="flat" cmpd="sng" algn="ctr">
                       <a:solidFill>
-                        <a:srgbClr val="B8C4C3"/>
+                        <a:srgbClr val="D5DCE6"/>
                       </a:solidFill>
                       <a:prstDash val="solid"/>
                       <a:round/>
@@ -2877,13 +3584,16 @@
                     </a:lnT>
                     <a:lnB w="9525" cap="flat" cmpd="sng" algn="ctr">
                       <a:solidFill>
-                        <a:srgbClr val="B8C4C3"/>
+                        <a:srgbClr val="D5DCE6"/>
                       </a:solidFill>
                       <a:prstDash val="solid"/>
                       <a:round/>
                       <a:headEnd type="none" w="med" len="med"/>
                       <a:tailEnd type="none" w="med" len="med"/>
                     </a:lnB>
+                    <a:solidFill>
+                      <a:srgbClr val="FFFFFF"/>
+                    </a:solidFill>
                   </a:tcPr>
                 </a:tc>
                 <a:tc>
@@ -2897,7 +3607,7 @@
                       <a:r>
                         <a:rPr lang="en-US" sz="1400" dirty="0">
                           <a:solidFill>
-                            <a:srgbClr val="1B1F2A"/>
+                            <a:srgbClr val="1A2433"/>
                           </a:solidFill>
                         </a:rPr>
                         <a:t>Phụ thuộc nhà cung cấp (P. Quản trị)</a:t>
@@ -2908,7 +3618,7 @@
                   <a:tcPr marL="91440" marR="91440" marT="54864" marB="54864" anchor="ctr">
                     <a:lnL w="9525" cap="flat" cmpd="sng" algn="ctr">
                       <a:solidFill>
-                        <a:srgbClr val="B8C4C3"/>
+                        <a:srgbClr val="D5DCE6"/>
                       </a:solidFill>
                       <a:prstDash val="solid"/>
                       <a:round/>
@@ -2917,7 +3627,7 @@
                     </a:lnL>
                     <a:lnR w="9525" cap="flat" cmpd="sng" algn="ctr">
                       <a:solidFill>
-                        <a:srgbClr val="B8C4C3"/>
+                        <a:srgbClr val="D5DCE6"/>
                       </a:solidFill>
                       <a:prstDash val="solid"/>
                       <a:round/>
@@ -2926,7 +3636,7 @@
                     </a:lnR>
                     <a:lnT w="9525" cap="flat" cmpd="sng" algn="ctr">
                       <a:solidFill>
-                        <a:srgbClr val="B8C4C3"/>
+                        <a:srgbClr val="D5DCE6"/>
                       </a:solidFill>
                       <a:prstDash val="solid"/>
                       <a:round/>
@@ -2935,13 +3645,16 @@
                     </a:lnT>
                     <a:lnB w="9525" cap="flat" cmpd="sng" algn="ctr">
                       <a:solidFill>
-                        <a:srgbClr val="B8C4C3"/>
+                        <a:srgbClr val="D5DCE6"/>
                       </a:solidFill>
                       <a:prstDash val="solid"/>
                       <a:round/>
                       <a:headEnd type="none" w="med" len="med"/>
                       <a:tailEnd type="none" w="med" len="med"/>
                     </a:lnB>
+                    <a:solidFill>
+                      <a:srgbClr val="FFFFFF"/>
+                    </a:solidFill>
                   </a:tcPr>
                 </a:tc>
               </a:tr>
@@ -2957,7 +3670,7 @@
                       <a:r>
                         <a:rPr lang="en-US" sz="1400" b="1" dirty="0">
                           <a:solidFill>
-                            <a:srgbClr val="1B1F2A"/>
+                            <a:srgbClr val="1A2433"/>
                           </a:solidFill>
                         </a:rPr>
                         <a:t>Phù hợp chiến lược</a:t>
@@ -2968,7 +3681,7 @@
                   <a:tcPr marL="91440" marR="91440" marT="54864" marB="54864" anchor="ctr">
                     <a:lnL w="9525" cap="flat" cmpd="sng" algn="ctr">
                       <a:solidFill>
-                        <a:srgbClr val="B8C4C3"/>
+                        <a:srgbClr val="D5DCE6"/>
                       </a:solidFill>
                       <a:prstDash val="solid"/>
                       <a:round/>
@@ -2977,7 +3690,7 @@
                     </a:lnL>
                     <a:lnR w="9525" cap="flat" cmpd="sng" algn="ctr">
                       <a:solidFill>
-                        <a:srgbClr val="B8C4C3"/>
+                        <a:srgbClr val="D5DCE6"/>
                       </a:solidFill>
                       <a:prstDash val="solid"/>
                       <a:round/>
@@ -2986,7 +3699,7 @@
                     </a:lnR>
                     <a:lnT w="9525" cap="flat" cmpd="sng" algn="ctr">
                       <a:solidFill>
-                        <a:srgbClr val="B8C4C3"/>
+                        <a:srgbClr val="D5DCE6"/>
                       </a:solidFill>
                       <a:prstDash val="solid"/>
                       <a:round/>
@@ -2995,13 +3708,16 @@
                     </a:lnT>
                     <a:lnB w="9525" cap="flat" cmpd="sng" algn="ctr">
                       <a:solidFill>
-                        <a:srgbClr val="B8C4C3"/>
+                        <a:srgbClr val="D5DCE6"/>
                       </a:solidFill>
                       <a:prstDash val="solid"/>
                       <a:round/>
                       <a:headEnd type="none" w="med" len="med"/>
                       <a:tailEnd type="none" w="med" len="med"/>
                     </a:lnB>
+                    <a:solidFill>
+                      <a:srgbClr val="F1F4F8"/>
+                    </a:solidFill>
                   </a:tcPr>
                 </a:tc>
                 <a:tc>
@@ -3015,7 +3731,7 @@
                       <a:r>
                         <a:rPr lang="en-US" sz="1400" dirty="0">
                           <a:solidFill>
-                            <a:srgbClr val="1B1F2A"/>
+                            <a:srgbClr val="1A2433"/>
                           </a:solidFill>
                         </a:rPr>
                         <a:t>Phù hợp kế hoạch CĐS (KH chuyển đổi số)</a:t>
@@ -3026,7 +3742,7 @@
                   <a:tcPr marL="91440" marR="91440" marT="54864" marB="54864" anchor="ctr">
                     <a:lnL w="9525" cap="flat" cmpd="sng" algn="ctr">
                       <a:solidFill>
-                        <a:srgbClr val="B8C4C3"/>
+                        <a:srgbClr val="D5DCE6"/>
                       </a:solidFill>
                       <a:prstDash val="solid"/>
                       <a:round/>
@@ -3035,7 +3751,7 @@
                     </a:lnL>
                     <a:lnR w="9525" cap="flat" cmpd="sng" algn="ctr">
                       <a:solidFill>
-                        <a:srgbClr val="B8C4C3"/>
+                        <a:srgbClr val="D5DCE6"/>
                       </a:solidFill>
                       <a:prstDash val="solid"/>
                       <a:round/>
@@ -3044,7 +3760,7 @@
                     </a:lnR>
                     <a:lnT w="9525" cap="flat" cmpd="sng" algn="ctr">
                       <a:solidFill>
-                        <a:srgbClr val="B8C4C3"/>
+                        <a:srgbClr val="D5DCE6"/>
                       </a:solidFill>
                       <a:prstDash val="solid"/>
                       <a:round/>
@@ -3053,13 +3769,16 @@
                     </a:lnT>
                     <a:lnB w="9525" cap="flat" cmpd="sng" algn="ctr">
                       <a:solidFill>
-                        <a:srgbClr val="B8C4C3"/>
+                        <a:srgbClr val="D5DCE6"/>
                       </a:solidFill>
                       <a:prstDash val="solid"/>
                       <a:round/>
                       <a:headEnd type="none" w="med" len="med"/>
                       <a:tailEnd type="none" w="med" len="med"/>
                     </a:lnB>
+                    <a:solidFill>
+                      <a:srgbClr val="F1F4F8"/>
+                    </a:solidFill>
                   </a:tcPr>
                 </a:tc>
                 <a:tc>
@@ -3073,7 +3792,7 @@
                       <a:r>
                         <a:rPr lang="en-US" sz="1400" dirty="0">
                           <a:solidFill>
-                            <a:srgbClr val="1B1F2A"/>
+                            <a:srgbClr val="1A2433"/>
                           </a:solidFill>
                         </a:rPr>
                         <a:t>Chưa có số liệu</a:t>
@@ -3084,7 +3803,7 @@
                   <a:tcPr marL="91440" marR="91440" marT="54864" marB="54864" anchor="ctr">
                     <a:lnL w="9525" cap="flat" cmpd="sng" algn="ctr">
                       <a:solidFill>
-                        <a:srgbClr val="B8C4C3"/>
+                        <a:srgbClr val="D5DCE6"/>
                       </a:solidFill>
                       <a:prstDash val="solid"/>
                       <a:round/>
@@ -3093,7 +3812,7 @@
                     </a:lnL>
                     <a:lnR w="9525" cap="flat" cmpd="sng" algn="ctr">
                       <a:solidFill>
-                        <a:srgbClr val="B8C4C3"/>
+                        <a:srgbClr val="D5DCE6"/>
                       </a:solidFill>
                       <a:prstDash val="solid"/>
                       <a:round/>
@@ -3102,7 +3821,7 @@
                     </a:lnR>
                     <a:lnT w="9525" cap="flat" cmpd="sng" algn="ctr">
                       <a:solidFill>
-                        <a:srgbClr val="B8C4C3"/>
+                        <a:srgbClr val="D5DCE6"/>
                       </a:solidFill>
                       <a:prstDash val="solid"/>
                       <a:round/>
@@ -3111,13 +3830,16 @@
                     </a:lnT>
                     <a:lnB w="9525" cap="flat" cmpd="sng" algn="ctr">
                       <a:solidFill>
-                        <a:srgbClr val="B8C4C3"/>
+                        <a:srgbClr val="D5DCE6"/>
                       </a:solidFill>
                       <a:prstDash val="solid"/>
                       <a:round/>
                       <a:headEnd type="none" w="med" len="med"/>
                       <a:tailEnd type="none" w="med" len="med"/>
                     </a:lnB>
+                    <a:solidFill>
+                      <a:srgbClr val="F1F4F8"/>
+                    </a:solidFill>
                   </a:tcPr>
                 </a:tc>
                 <a:tc>
@@ -3131,7 +3853,7 @@
                       <a:r>
                         <a:rPr lang="en-US" sz="1400" dirty="0">
                           <a:solidFill>
-                            <a:srgbClr val="1B1F2A"/>
+                            <a:srgbClr val="1A2433"/>
                           </a:solidFill>
                         </a:rPr>
                         <a:t>Chưa có số liệu</a:t>
@@ -3142,7 +3864,7 @@
                   <a:tcPr marL="91440" marR="91440" marT="54864" marB="54864" anchor="ctr">
                     <a:lnL w="9525" cap="flat" cmpd="sng" algn="ctr">
                       <a:solidFill>
-                        <a:srgbClr val="B8C4C3"/>
+                        <a:srgbClr val="D5DCE6"/>
                       </a:solidFill>
                       <a:prstDash val="solid"/>
                       <a:round/>
@@ -3151,7 +3873,7 @@
                     </a:lnL>
                     <a:lnR w="9525" cap="flat" cmpd="sng" algn="ctr">
                       <a:solidFill>
-                        <a:srgbClr val="B8C4C3"/>
+                        <a:srgbClr val="D5DCE6"/>
                       </a:solidFill>
                       <a:prstDash val="solid"/>
                       <a:round/>
@@ -3160,7 +3882,7 @@
                     </a:lnR>
                     <a:lnT w="9525" cap="flat" cmpd="sng" algn="ctr">
                       <a:solidFill>
-                        <a:srgbClr val="B8C4C3"/>
+                        <a:srgbClr val="D5DCE6"/>
                       </a:solidFill>
                       <a:prstDash val="solid"/>
                       <a:round/>
@@ -3169,13 +3891,16 @@
                     </a:lnT>
                     <a:lnB w="9525" cap="flat" cmpd="sng" algn="ctr">
                       <a:solidFill>
-                        <a:srgbClr val="B8C4C3"/>
+                        <a:srgbClr val="D5DCE6"/>
                       </a:solidFill>
                       <a:prstDash val="solid"/>
                       <a:round/>
                       <a:headEnd type="none" w="med" len="med"/>
                       <a:tailEnd type="none" w="med" len="med"/>
                     </a:lnB>
+                    <a:solidFill>
+                      <a:srgbClr val="F1F4F8"/>
+                    </a:solidFill>
                   </a:tcPr>
                 </a:tc>
               </a:tr>
@@ -3191,8 +3916,8 @@
         </p:nvSpPr>
         <p:spPr>
           <a:xfrm>
-            <a:off x="457200" y="4617720"/>
-            <a:ext cx="8229600" cy="320040"/>
+            <a:off x="548640" y="4416552"/>
+            <a:ext cx="8046720" cy="274320"/>
           </a:xfrm>
           <a:prstGeom prst="rect">
             <a:avLst/>
@@ -3210,12 +3935,57 @@
             <a:r>
               <a:rPr lang="en-US" sz="1100" i="1" dirty="0">
                 <a:solidFill>
-                  <a:srgbClr val="5A6666"/>
+                  <a:srgbClr val="6B7A90"/>
                 </a:solidFill>
               </a:rPr>
               <a:t>Nguồn: báo giá NCC-01 (mẫu), ý kiến các phòng. 'Chưa có số liệu' nghĩa là chưa có nguồn kèm theo</a:t>
             </a:r>
             <a:endParaRPr lang="en-US" sz="1100" dirty="0"/>
+          </a:p>
+        </p:txBody>
+      </p:sp>
+      <p:sp>
+        <p:nvSpPr>
+          <p:cNvPr id="25" name="Slide Number Placeholder 0"/>
+          <p:cNvSpPr>
+            <a:spLocks noGrp="1"/>
+          </p:cNvSpPr>
+          <p:nvPr>
+            <p:ph type="sldNum" sz="quarter" idx="4294967295"/>
+          </p:nvPr>
+        </p:nvSpPr>
+        <p:spPr>
+          <a:xfrm>
+            <a:off x="8138160" y="4727448"/>
+            <a:ext cx="457200" cy="274320"/>
+          </a:xfrm>
+          <a:prstGeom prst="rect">
+            <a:avLst/>
+          </a:prstGeom>
+          <a:extLst>
+            <a:ext uri="{C572A759-6A51-4108-AA02-DFA0A04FC94B}">
+              <ma14:wrappingTextBoxFlag xmlns:ma14="http://schemas.microsoft.com/office/mac/drawingml/2011/main" val="0"/>
+            </a:ext>
+          </a:extLst>
+        </p:spPr>
+        <p:txBody>
+          <a:bodyPr/>
+          <a:lstStyle>
+            <a:lvl1pPr>
+              <a:defRPr sz="1100">
+                <a:solidFill>
+                  <a:srgbClr val="6B7A90"/>
+                </a:solidFill>
+              </a:defRPr>
+            </a:lvl1pPr>
+          </a:lstStyle>
+          <a:p>
+            <a:pPr algn="r"/>
+            <a:fld id="{F7021451-1387-4CA6-816F-3879F97B5CBC}" type="slidenum">
+              <a:rPr b="0" lang="en-US"/>
+              <a:t>3</a:t>
+            </a:fld>
+            <a:endParaRPr lang="en-US"/>
           </a:p>
         </p:txBody>
       </p:sp>
@@ -3254,8 +4024,8 @@
         </p:nvSpPr>
         <p:spPr>
           <a:xfrm>
-            <a:off x="457200" y="274320"/>
-            <a:ext cx="8229600" cy="868680"/>
+            <a:off x="548640" y="274320"/>
+            <a:ext cx="8046720" cy="868680"/>
           </a:xfrm>
           <a:prstGeom prst="rect">
             <a:avLst/>
@@ -3273,10 +4043,10 @@
             <a:r>
               <a:rPr lang="en-US" sz="2800" b="1" dirty="0">
                 <a:solidFill>
-                  <a:srgbClr val="0F3D3E"/>
+                  <a:srgbClr val="0B2A4A"/>
                 </a:solidFill>
               </a:rPr>
-              <a:t>Những điều còn chưa rõ trước khi quyết định</a:t>
+              <a:t>Bốn điều còn chưa rõ trước khi quyết định</a:t>
             </a:r>
             <a:endParaRPr lang="en-US" sz="2800" dirty="0"/>
           </a:p>
@@ -3284,14 +4054,66 @@
       </p:sp>
       <p:sp>
         <p:nvSpPr>
-          <p:cNvPr id="4" name="noi-dung"/>
+          <p:cNvPr id="4" name="the"/>
+          <p:cNvSpPr/>
+          <p:nvPr/>
+        </p:nvSpPr>
+        <p:spPr>
+          <a:xfrm>
+            <a:off x="548640" y="1280160"/>
+            <a:ext cx="8046720" cy="658368"/>
+          </a:xfrm>
+          <a:prstGeom prst="roundRect">
+            <a:avLst>
+              <a:gd name="adj" fmla="val 11111"/>
+            </a:avLst>
+          </a:prstGeom>
+          <a:solidFill>
+            <a:srgbClr val="F1F4F8"/>
+          </a:solidFill>
+          <a:ln w="12700">
+            <a:solidFill>
+              <a:srgbClr val="F1F4F8"/>
+            </a:solidFill>
+            <a:prstDash val="solid"/>
+          </a:ln>
+        </p:spPr>
+      </p:sp>
+      <p:sp>
+        <p:nvSpPr>
+          <p:cNvPr id="5" name="so-thu-tu"/>
+          <p:cNvSpPr/>
+          <p:nvPr/>
+        </p:nvSpPr>
+        <p:spPr>
+          <a:xfrm>
+            <a:off x="777240" y="1312164"/>
+            <a:ext cx="594360" cy="594360"/>
+          </a:xfrm>
+          <a:prstGeom prst="ellipse">
+            <a:avLst/>
+          </a:prstGeom>
+          <a:solidFill>
+            <a:srgbClr val="B8902B"/>
+          </a:solidFill>
+          <a:ln w="12700">
+            <a:solidFill>
+              <a:srgbClr val="B8902B"/>
+            </a:solidFill>
+            <a:prstDash val="solid"/>
+          </a:ln>
+        </p:spPr>
+      </p:sp>
+      <p:sp>
+        <p:nvSpPr>
+          <p:cNvPr id="6" name="so-thu-tu-chu"/>
           <p:cNvSpPr txBox="1"/>
           <p:nvPr/>
         </p:nvSpPr>
         <p:spPr>
           <a:xfrm>
-            <a:off x="457200" y="1371600"/>
-            <a:ext cx="8229600" cy="2743200"/>
+            <a:off x="777240" y="1312164"/>
+            <a:ext cx="594360" cy="594360"/>
           </a:xfrm>
           <a:prstGeom prst="rect">
             <a:avLst/>
@@ -3300,79 +4122,486 @@
           <a:ln/>
         </p:spPr>
         <p:txBody>
-          <a:bodyPr wrap="square" lIns="0" tIns="0" rIns="0" bIns="0" rtlCol="0" anchor="t"/>
+          <a:bodyPr wrap="square" lIns="0" tIns="0" rIns="0" bIns="0" rtlCol="0" anchor="ctr"/>
           <a:lstStyle/>
           <a:p>
-            <a:pPr marL="342900" indent="-342900">
-              <a:spcAft>
-                <a:spcPts val="800"/>
-              </a:spcAft>
-              <a:buSzPct val="100000"/>
-              <a:buChar char="•"/>
+            <a:pPr algn="ctr" indent="0" marL="0">
+              <a:buNone/>
             </a:pPr>
             <a:r>
-              <a:rPr lang="en-US" sz="2000" dirty="0">
+              <a:rPr lang="en-US" sz="2200" b="1" dirty="0">
                 <a:solidFill>
-                  <a:srgbClr val="1B1F2A"/>
+                  <a:srgbClr val="FFFFFF"/>
+                </a:solidFill>
+                <a:latin typeface="Cambria" pitchFamily="34" charset="0"/>
+                <a:ea typeface="Cambria" pitchFamily="34" charset="-122"/>
+                <a:cs typeface="Cambria" pitchFamily="34" charset="-120"/>
+              </a:rPr>
+              <a:t>1</a:t>
+            </a:r>
+            <a:endParaRPr lang="en-US" sz="2200" dirty="0"/>
+          </a:p>
+        </p:txBody>
+      </p:sp>
+      <p:sp>
+        <p:nvSpPr>
+          <p:cNvPr id="7" name="the-chu"/>
+          <p:cNvSpPr txBox="1"/>
+          <p:nvPr/>
+        </p:nvSpPr>
+        <p:spPr>
+          <a:xfrm>
+            <a:off x="1600200" y="1353312"/>
+            <a:ext cx="6766560" cy="512064"/>
+          </a:xfrm>
+          <a:prstGeom prst="rect">
+            <a:avLst/>
+          </a:prstGeom>
+          <a:noFill/>
+          <a:ln/>
+        </p:spPr>
+        <p:txBody>
+          <a:bodyPr wrap="square" lIns="0" tIns="0" rIns="0" bIns="0" rtlCol="0" anchor="ctr"/>
+          <a:lstStyle/>
+          <a:p>
+            <a:pPr indent="0" marL="0">
+              <a:buNone/>
+            </a:pPr>
+            <a:r>
+              <a:rPr lang="en-US" sz="1800" b="1" dirty="0">
+                <a:solidFill>
+                  <a:srgbClr val="0B2A4A"/>
                 </a:solidFill>
               </a:rPr>
               <a:t>Chưa có báo giá phương án C</a:t>
             </a:r>
-            <a:endParaRPr lang="en-US" sz="2000" dirty="0"/>
-          </a:p>
-          <a:p>
-            <a:pPr marL="342900" indent="-342900">
-              <a:spcAft>
-                <a:spcPts val="800"/>
-              </a:spcAft>
-              <a:buSzPct val="100000"/>
-              <a:buChar char="•"/>
+            <a:endParaRPr lang="en-US" sz="1800" dirty="0"/>
+          </a:p>
+        </p:txBody>
+      </p:sp>
+      <p:sp>
+        <p:nvSpPr>
+          <p:cNvPr id="8" name="the"/>
+          <p:cNvSpPr/>
+          <p:nvPr/>
+        </p:nvSpPr>
+        <p:spPr>
+          <a:xfrm>
+            <a:off x="548640" y="2057400"/>
+            <a:ext cx="8046720" cy="658368"/>
+          </a:xfrm>
+          <a:prstGeom prst="roundRect">
+            <a:avLst>
+              <a:gd name="adj" fmla="val 11111"/>
+            </a:avLst>
+          </a:prstGeom>
+          <a:solidFill>
+            <a:srgbClr val="F1F4F8"/>
+          </a:solidFill>
+          <a:ln w="12700">
+            <a:solidFill>
+              <a:srgbClr val="F1F4F8"/>
+            </a:solidFill>
+            <a:prstDash val="solid"/>
+          </a:ln>
+        </p:spPr>
+      </p:sp>
+      <p:sp>
+        <p:nvSpPr>
+          <p:cNvPr id="9" name="so-thu-tu"/>
+          <p:cNvSpPr/>
+          <p:nvPr/>
+        </p:nvSpPr>
+        <p:spPr>
+          <a:xfrm>
+            <a:off x="777240" y="2089404"/>
+            <a:ext cx="594360" cy="594360"/>
+          </a:xfrm>
+          <a:prstGeom prst="ellipse">
+            <a:avLst/>
+          </a:prstGeom>
+          <a:solidFill>
+            <a:srgbClr val="B8902B"/>
+          </a:solidFill>
+          <a:ln w="12700">
+            <a:solidFill>
+              <a:srgbClr val="B8902B"/>
+            </a:solidFill>
+            <a:prstDash val="solid"/>
+          </a:ln>
+        </p:spPr>
+      </p:sp>
+      <p:sp>
+        <p:nvSpPr>
+          <p:cNvPr id="10" name="so-thu-tu-chu"/>
+          <p:cNvSpPr txBox="1"/>
+          <p:nvPr/>
+        </p:nvSpPr>
+        <p:spPr>
+          <a:xfrm>
+            <a:off x="777240" y="2089404"/>
+            <a:ext cx="594360" cy="594360"/>
+          </a:xfrm>
+          <a:prstGeom prst="rect">
+            <a:avLst/>
+          </a:prstGeom>
+          <a:noFill/>
+          <a:ln/>
+        </p:spPr>
+        <p:txBody>
+          <a:bodyPr wrap="square" lIns="0" tIns="0" rIns="0" bIns="0" rtlCol="0" anchor="ctr"/>
+          <a:lstStyle/>
+          <a:p>
+            <a:pPr algn="ctr" indent="0" marL="0">
+              <a:buNone/>
             </a:pPr>
             <a:r>
-              <a:rPr lang="en-US" sz="2000" dirty="0">
+              <a:rPr lang="en-US" sz="2200" b="1" dirty="0">
                 <a:solidFill>
-                  <a:srgbClr val="1B1F2A"/>
+                  <a:srgbClr val="FFFFFF"/>
+                </a:solidFill>
+                <a:latin typeface="Cambria" pitchFamily="34" charset="0"/>
+                <a:ea typeface="Cambria" pitchFamily="34" charset="-122"/>
+                <a:cs typeface="Cambria" pitchFamily="34" charset="-120"/>
+              </a:rPr>
+              <a:t>2</a:t>
+            </a:r>
+            <a:endParaRPr lang="en-US" sz="2200" dirty="0"/>
+          </a:p>
+        </p:txBody>
+      </p:sp>
+      <p:sp>
+        <p:nvSpPr>
+          <p:cNvPr id="11" name="the-chu"/>
+          <p:cNvSpPr txBox="1"/>
+          <p:nvPr/>
+        </p:nvSpPr>
+        <p:spPr>
+          <a:xfrm>
+            <a:off x="1600200" y="2130552"/>
+            <a:ext cx="6766560" cy="512064"/>
+          </a:xfrm>
+          <a:prstGeom prst="rect">
+            <a:avLst/>
+          </a:prstGeom>
+          <a:noFill/>
+          <a:ln/>
+        </p:spPr>
+        <p:txBody>
+          <a:bodyPr wrap="square" lIns="0" tIns="0" rIns="0" bIns="0" rtlCol="0" anchor="ctr"/>
+          <a:lstStyle/>
+          <a:p>
+            <a:pPr indent="0" marL="0">
+              <a:buNone/>
+            </a:pPr>
+            <a:r>
+              <a:rPr lang="en-US" sz="1800" b="1" dirty="0">
+                <a:solidFill>
+                  <a:srgbClr val="0B2A4A"/>
                 </a:solidFill>
               </a:rPr>
               <a:t>Chưa đánh giá phù hợp chiến lược của phương án B</a:t>
             </a:r>
-            <a:endParaRPr lang="en-US" sz="2000" dirty="0"/>
-          </a:p>
-          <a:p>
-            <a:pPr marL="342900" indent="-342900">
-              <a:spcAft>
-                <a:spcPts val="800"/>
-              </a:spcAft>
-              <a:buSzPct val="100000"/>
-              <a:buChar char="•"/>
+            <a:endParaRPr lang="en-US" sz="1800" dirty="0"/>
+          </a:p>
+        </p:txBody>
+      </p:sp>
+      <p:sp>
+        <p:nvSpPr>
+          <p:cNvPr id="12" name="the"/>
+          <p:cNvSpPr/>
+          <p:nvPr/>
+        </p:nvSpPr>
+        <p:spPr>
+          <a:xfrm>
+            <a:off x="548640" y="2834640"/>
+            <a:ext cx="8046720" cy="658368"/>
+          </a:xfrm>
+          <a:prstGeom prst="roundRect">
+            <a:avLst>
+              <a:gd name="adj" fmla="val 11111"/>
+            </a:avLst>
+          </a:prstGeom>
+          <a:solidFill>
+            <a:srgbClr val="F1F4F8"/>
+          </a:solidFill>
+          <a:ln w="12700">
+            <a:solidFill>
+              <a:srgbClr val="F1F4F8"/>
+            </a:solidFill>
+            <a:prstDash val="solid"/>
+          </a:ln>
+        </p:spPr>
+      </p:sp>
+      <p:sp>
+        <p:nvSpPr>
+          <p:cNvPr id="13" name="so-thu-tu"/>
+          <p:cNvSpPr/>
+          <p:nvPr/>
+        </p:nvSpPr>
+        <p:spPr>
+          <a:xfrm>
+            <a:off x="777240" y="2866644"/>
+            <a:ext cx="594360" cy="594360"/>
+          </a:xfrm>
+          <a:prstGeom prst="ellipse">
+            <a:avLst/>
+          </a:prstGeom>
+          <a:solidFill>
+            <a:srgbClr val="B8902B"/>
+          </a:solidFill>
+          <a:ln w="12700">
+            <a:solidFill>
+              <a:srgbClr val="B8902B"/>
+            </a:solidFill>
+            <a:prstDash val="solid"/>
+          </a:ln>
+        </p:spPr>
+      </p:sp>
+      <p:sp>
+        <p:nvSpPr>
+          <p:cNvPr id="14" name="so-thu-tu-chu"/>
+          <p:cNvSpPr txBox="1"/>
+          <p:nvPr/>
+        </p:nvSpPr>
+        <p:spPr>
+          <a:xfrm>
+            <a:off x="777240" y="2866644"/>
+            <a:ext cx="594360" cy="594360"/>
+          </a:xfrm>
+          <a:prstGeom prst="rect">
+            <a:avLst/>
+          </a:prstGeom>
+          <a:noFill/>
+          <a:ln/>
+        </p:spPr>
+        <p:txBody>
+          <a:bodyPr wrap="square" lIns="0" tIns="0" rIns="0" bIns="0" rtlCol="0" anchor="ctr"/>
+          <a:lstStyle/>
+          <a:p>
+            <a:pPr algn="ctr" indent="0" marL="0">
+              <a:buNone/>
             </a:pPr>
             <a:r>
-              <a:rPr lang="en-US" sz="2000" dirty="0">
+              <a:rPr lang="en-US" sz="2200" b="1" dirty="0">
                 <a:solidFill>
-                  <a:srgbClr val="1B1F2A"/>
+                  <a:srgbClr val="FFFFFF"/>
+                </a:solidFill>
+                <a:latin typeface="Cambria" pitchFamily="34" charset="0"/>
+                <a:ea typeface="Cambria" pitchFamily="34" charset="-122"/>
+                <a:cs typeface="Cambria" pitchFamily="34" charset="-120"/>
+              </a:rPr>
+              <a:t>3</a:t>
+            </a:r>
+            <a:endParaRPr lang="en-US" sz="2200" dirty="0"/>
+          </a:p>
+        </p:txBody>
+      </p:sp>
+      <p:sp>
+        <p:nvSpPr>
+          <p:cNvPr id="15" name="the-chu"/>
+          <p:cNvSpPr txBox="1"/>
+          <p:nvPr/>
+        </p:nvSpPr>
+        <p:spPr>
+          <a:xfrm>
+            <a:off x="1600200" y="2907792"/>
+            <a:ext cx="6766560" cy="512064"/>
+          </a:xfrm>
+          <a:prstGeom prst="rect">
+            <a:avLst/>
+          </a:prstGeom>
+          <a:noFill/>
+          <a:ln/>
+        </p:spPr>
+        <p:txBody>
+          <a:bodyPr wrap="square" lIns="0" tIns="0" rIns="0" bIns="0" rtlCol="0" anchor="ctr"/>
+          <a:lstStyle/>
+          <a:p>
+            <a:pPr indent="0" marL="0">
+              <a:buNone/>
+            </a:pPr>
+            <a:r>
+              <a:rPr lang="en-US" sz="1800" b="1" dirty="0">
+                <a:solidFill>
+                  <a:srgbClr val="0B2A4A"/>
                 </a:solidFill>
               </a:rPr>
               <a:t>Giai đoạn 2 của phương án B chưa có ngân sách</a:t>
             </a:r>
-            <a:endParaRPr lang="en-US" sz="2000" dirty="0"/>
-          </a:p>
-          <a:p>
-            <a:pPr marL="342900" indent="-342900">
-              <a:spcAft>
-                <a:spcPts val="800"/>
-              </a:spcAft>
-              <a:buSzPct val="100000"/>
-              <a:buChar char="•"/>
+            <a:endParaRPr lang="en-US" sz="1800" dirty="0"/>
+          </a:p>
+        </p:txBody>
+      </p:sp>
+      <p:sp>
+        <p:nvSpPr>
+          <p:cNvPr id="16" name="the"/>
+          <p:cNvSpPr/>
+          <p:nvPr/>
+        </p:nvSpPr>
+        <p:spPr>
+          <a:xfrm>
+            <a:off x="548640" y="3611880"/>
+            <a:ext cx="8046720" cy="658368"/>
+          </a:xfrm>
+          <a:prstGeom prst="roundRect">
+            <a:avLst>
+              <a:gd name="adj" fmla="val 11111"/>
+            </a:avLst>
+          </a:prstGeom>
+          <a:solidFill>
+            <a:srgbClr val="F1F4F8"/>
+          </a:solidFill>
+          <a:ln w="12700">
+            <a:solidFill>
+              <a:srgbClr val="F1F4F8"/>
+            </a:solidFill>
+            <a:prstDash val="solid"/>
+          </a:ln>
+        </p:spPr>
+      </p:sp>
+      <p:sp>
+        <p:nvSpPr>
+          <p:cNvPr id="17" name="so-thu-tu"/>
+          <p:cNvSpPr/>
+          <p:nvPr/>
+        </p:nvSpPr>
+        <p:spPr>
+          <a:xfrm>
+            <a:off x="777240" y="3643884"/>
+            <a:ext cx="594360" cy="594360"/>
+          </a:xfrm>
+          <a:prstGeom prst="ellipse">
+            <a:avLst/>
+          </a:prstGeom>
+          <a:solidFill>
+            <a:srgbClr val="B8902B"/>
+          </a:solidFill>
+          <a:ln w="12700">
+            <a:solidFill>
+              <a:srgbClr val="B8902B"/>
+            </a:solidFill>
+            <a:prstDash val="solid"/>
+          </a:ln>
+        </p:spPr>
+      </p:sp>
+      <p:sp>
+        <p:nvSpPr>
+          <p:cNvPr id="18" name="so-thu-tu-chu"/>
+          <p:cNvSpPr txBox="1"/>
+          <p:nvPr/>
+        </p:nvSpPr>
+        <p:spPr>
+          <a:xfrm>
+            <a:off x="777240" y="3643884"/>
+            <a:ext cx="594360" cy="594360"/>
+          </a:xfrm>
+          <a:prstGeom prst="rect">
+            <a:avLst/>
+          </a:prstGeom>
+          <a:noFill/>
+          <a:ln/>
+        </p:spPr>
+        <p:txBody>
+          <a:bodyPr wrap="square" lIns="0" tIns="0" rIns="0" bIns="0" rtlCol="0" anchor="ctr"/>
+          <a:lstStyle/>
+          <a:p>
+            <a:pPr algn="ctr" indent="0" marL="0">
+              <a:buNone/>
             </a:pPr>
             <a:r>
-              <a:rPr lang="en-US" sz="2000" dirty="0">
+              <a:rPr lang="en-US" sz="2200" b="1" dirty="0">
                 <a:solidFill>
-                  <a:srgbClr val="1B1F2A"/>
+                  <a:srgbClr val="FFFFFF"/>
+                </a:solidFill>
+                <a:latin typeface="Cambria" pitchFamily="34" charset="0"/>
+                <a:ea typeface="Cambria" pitchFamily="34" charset="-122"/>
+                <a:cs typeface="Cambria" pitchFamily="34" charset="-120"/>
+              </a:rPr>
+              <a:t>4</a:t>
+            </a:r>
+            <a:endParaRPr lang="en-US" sz="2200" dirty="0"/>
+          </a:p>
+        </p:txBody>
+      </p:sp>
+      <p:sp>
+        <p:nvSpPr>
+          <p:cNvPr id="19" name="the-chu"/>
+          <p:cNvSpPr txBox="1"/>
+          <p:nvPr/>
+        </p:nvSpPr>
+        <p:spPr>
+          <a:xfrm>
+            <a:off x="1600200" y="3685032"/>
+            <a:ext cx="6766560" cy="512064"/>
+          </a:xfrm>
+          <a:prstGeom prst="rect">
+            <a:avLst/>
+          </a:prstGeom>
+          <a:noFill/>
+          <a:ln/>
+        </p:spPr>
+        <p:txBody>
+          <a:bodyPr wrap="square" lIns="0" tIns="0" rIns="0" bIns="0" rtlCol="0" anchor="ctr"/>
+          <a:lstStyle/>
+          <a:p>
+            <a:pPr indent="0" marL="0">
+              <a:buNone/>
+            </a:pPr>
+            <a:r>
+              <a:rPr lang="en-US" sz="1800" b="1" dirty="0">
+                <a:solidFill>
+                  <a:srgbClr val="0B2A4A"/>
                 </a:solidFill>
               </a:rPr>
               <a:t>Rủi ro gián đoạn lịch học của A chưa lượng hóa</a:t>
             </a:r>
-            <a:endParaRPr lang="en-US" sz="2000" dirty="0"/>
+            <a:endParaRPr lang="en-US" sz="1800" dirty="0"/>
+          </a:p>
+        </p:txBody>
+      </p:sp>
+      <p:sp>
+        <p:nvSpPr>
+          <p:cNvPr id="25" name="Slide Number Placeholder 0"/>
+          <p:cNvSpPr>
+            <a:spLocks noGrp="1"/>
+          </p:cNvSpPr>
+          <p:nvPr>
+            <p:ph type="sldNum" sz="quarter" idx="4294967295"/>
+          </p:nvPr>
+        </p:nvSpPr>
+        <p:spPr>
+          <a:xfrm>
+            <a:off x="8138160" y="4727448"/>
+            <a:ext cx="457200" cy="274320"/>
+          </a:xfrm>
+          <a:prstGeom prst="rect">
+            <a:avLst/>
+          </a:prstGeom>
+          <a:extLst>
+            <a:ext uri="{C572A759-6A51-4108-AA02-DFA0A04FC94B}">
+              <ma14:wrappingTextBoxFlag xmlns:ma14="http://schemas.microsoft.com/office/mac/drawingml/2011/main" val="0"/>
+            </a:ext>
+          </a:extLst>
+        </p:spPr>
+        <p:txBody>
+          <a:bodyPr/>
+          <a:lstStyle>
+            <a:lvl1pPr>
+              <a:defRPr sz="1100">
+                <a:solidFill>
+                  <a:srgbClr val="6B7A90"/>
+                </a:solidFill>
+              </a:defRPr>
+            </a:lvl1pPr>
+          </a:lstStyle>
+          <a:p>
+            <a:pPr algn="r"/>
+            <a:fld id="{F7021451-1387-4CA6-816F-3879F97B5CBC}" type="slidenum">
+              <a:rPr b="0" lang="en-US"/>
+              <a:t>4</a:t>
+            </a:fld>
+            <a:endParaRPr lang="en-US"/>
           </a:p>
         </p:txBody>
       </p:sp>
@@ -3411,8 +4640,8 @@
         </p:nvSpPr>
         <p:spPr>
           <a:xfrm>
-            <a:off x="457200" y="274320"/>
-            <a:ext cx="8229600" cy="868680"/>
+            <a:off x="548640" y="274320"/>
+            <a:ext cx="8046720" cy="868680"/>
           </a:xfrm>
           <a:prstGeom prst="rect">
             <a:avLst/>
@@ -3430,7 +4659,7 @@
             <a:r>
               <a:rPr lang="en-US" sz="2800" b="1" dirty="0">
                 <a:solidFill>
-                  <a:srgbClr val="0F3D3E"/>
+                  <a:srgbClr val="0B2A4A"/>
                 </a:solidFill>
               </a:rPr>
               <a:t>Hai câu hỏi lãnh đạo cần trả lời</a:t>
@@ -3454,8 +4683,8 @@
           </p:nvPr>
         </p:nvGraphicFramePr>
         <p:xfrm>
-          <a:off x="457200" y="1371600"/>
-          <a:ext cx="8229600" cy="914400"/>
+          <a:off x="548640" y="1371600"/>
+          <a:ext cx="8046720" cy="914400"/>
         </p:xfrm>
         <a:graphic>
           <a:graphicData uri="http://schemas.openxmlformats.org/drawingml/2006/table">
@@ -3464,7 +4693,7 @@
               <a:tblGrid>
                 <a:gridCol w="2377440"/>
                 <a:gridCol w="1645920"/>
-                <a:gridCol w="4206240"/>
+                <a:gridCol w="4023360"/>
               </a:tblGrid>
               <a:tr h="411480">
                 <a:tc>
@@ -3489,7 +4718,7 @@
                   <a:tcPr marL="91440" marR="91440" marT="54864" marB="54864" anchor="ctr">
                     <a:lnL w="9525" cap="flat" cmpd="sng" algn="ctr">
                       <a:solidFill>
-                        <a:srgbClr val="B8C4C3"/>
+                        <a:srgbClr val="D5DCE6"/>
                       </a:solidFill>
                       <a:prstDash val="solid"/>
                       <a:round/>
@@ -3498,7 +4727,7 @@
                     </a:lnL>
                     <a:lnR w="9525" cap="flat" cmpd="sng" algn="ctr">
                       <a:solidFill>
-                        <a:srgbClr val="B8C4C3"/>
+                        <a:srgbClr val="D5DCE6"/>
                       </a:solidFill>
                       <a:prstDash val="solid"/>
                       <a:round/>
@@ -3507,7 +4736,7 @@
                     </a:lnR>
                     <a:lnT w="9525" cap="flat" cmpd="sng" algn="ctr">
                       <a:solidFill>
-                        <a:srgbClr val="B8C4C3"/>
+                        <a:srgbClr val="D5DCE6"/>
                       </a:solidFill>
                       <a:prstDash val="solid"/>
                       <a:round/>
@@ -3516,7 +4745,7 @@
                     </a:lnT>
                     <a:lnB w="9525" cap="flat" cmpd="sng" algn="ctr">
                       <a:solidFill>
-                        <a:srgbClr val="B8C4C3"/>
+                        <a:srgbClr val="D5DCE6"/>
                       </a:solidFill>
                       <a:prstDash val="solid"/>
                       <a:round/>
@@ -3524,7 +4753,7 @@
                       <a:tailEnd type="none" w="med" len="med"/>
                     </a:lnB>
                     <a:solidFill>
-                      <a:srgbClr val="0F3D3E"/>
+                      <a:srgbClr val="0B2A4A"/>
                     </a:solidFill>
                   </a:tcPr>
                 </a:tc>
@@ -3550,7 +4779,7 @@
                   <a:tcPr marL="91440" marR="91440" marT="54864" marB="54864" anchor="ctr">
                     <a:lnL w="9525" cap="flat" cmpd="sng" algn="ctr">
                       <a:solidFill>
-                        <a:srgbClr val="B8C4C3"/>
+                        <a:srgbClr val="D5DCE6"/>
                       </a:solidFill>
                       <a:prstDash val="solid"/>
                       <a:round/>
@@ -3559,7 +4788,7 @@
                     </a:lnL>
                     <a:lnR w="9525" cap="flat" cmpd="sng" algn="ctr">
                       <a:solidFill>
-                        <a:srgbClr val="B8C4C3"/>
+                        <a:srgbClr val="D5DCE6"/>
                       </a:solidFill>
                       <a:prstDash val="solid"/>
                       <a:round/>
@@ -3568,7 +4797,7 @@
                     </a:lnR>
                     <a:lnT w="9525" cap="flat" cmpd="sng" algn="ctr">
                       <a:solidFill>
-                        <a:srgbClr val="B8C4C3"/>
+                        <a:srgbClr val="D5DCE6"/>
                       </a:solidFill>
                       <a:prstDash val="solid"/>
                       <a:round/>
@@ -3577,7 +4806,7 @@
                     </a:lnT>
                     <a:lnB w="9525" cap="flat" cmpd="sng" algn="ctr">
                       <a:solidFill>
-                        <a:srgbClr val="B8C4C3"/>
+                        <a:srgbClr val="D5DCE6"/>
                       </a:solidFill>
                       <a:prstDash val="solid"/>
                       <a:round/>
@@ -3585,7 +4814,7 @@
                       <a:tailEnd type="none" w="med" len="med"/>
                     </a:lnB>
                     <a:solidFill>
-                      <a:srgbClr val="0F3D3E"/>
+                      <a:srgbClr val="0B2A4A"/>
                     </a:solidFill>
                   </a:tcPr>
                 </a:tc>
@@ -3611,7 +4840,7 @@
                   <a:tcPr marL="91440" marR="91440" marT="54864" marB="54864" anchor="ctr">
                     <a:lnL w="9525" cap="flat" cmpd="sng" algn="ctr">
                       <a:solidFill>
-                        <a:srgbClr val="B8C4C3"/>
+                        <a:srgbClr val="D5DCE6"/>
                       </a:solidFill>
                       <a:prstDash val="solid"/>
                       <a:round/>
@@ -3620,7 +4849,7 @@
                     </a:lnL>
                     <a:lnR w="9525" cap="flat" cmpd="sng" algn="ctr">
                       <a:solidFill>
-                        <a:srgbClr val="B8C4C3"/>
+                        <a:srgbClr val="D5DCE6"/>
                       </a:solidFill>
                       <a:prstDash val="solid"/>
                       <a:round/>
@@ -3629,7 +4858,7 @@
                     </a:lnR>
                     <a:lnT w="9525" cap="flat" cmpd="sng" algn="ctr">
                       <a:solidFill>
-                        <a:srgbClr val="B8C4C3"/>
+                        <a:srgbClr val="D5DCE6"/>
                       </a:solidFill>
                       <a:prstDash val="solid"/>
                       <a:round/>
@@ -3638,7 +4867,7 @@
                     </a:lnT>
                     <a:lnB w="9525" cap="flat" cmpd="sng" algn="ctr">
                       <a:solidFill>
-                        <a:srgbClr val="B8C4C3"/>
+                        <a:srgbClr val="D5DCE6"/>
                       </a:solidFill>
                       <a:prstDash val="solid"/>
                       <a:round/>
@@ -3646,7 +4875,7 @@
                       <a:tailEnd type="none" w="med" len="med"/>
                     </a:lnB>
                     <a:solidFill>
-                      <a:srgbClr val="0F3D3E"/>
+                      <a:srgbClr val="0B2A4A"/>
                     </a:solidFill>
                   </a:tcPr>
                 </a:tc>
@@ -3663,7 +4892,7 @@
                       <a:r>
                         <a:rPr lang="en-US" sz="1400" b="1" dirty="0">
                           <a:solidFill>
-                            <a:srgbClr val="1B1F2A"/>
+                            <a:srgbClr val="1A2433"/>
                           </a:solidFill>
                         </a:rPr>
                         <a:t>Chọn phương án nào</a:t>
@@ -3674,7 +4903,7 @@
                   <a:tcPr marL="91440" marR="91440" marT="54864" marB="54864" anchor="ctr">
                     <a:lnL w="9525" cap="flat" cmpd="sng" algn="ctr">
                       <a:solidFill>
-                        <a:srgbClr val="B8C4C3"/>
+                        <a:srgbClr val="D5DCE6"/>
                       </a:solidFill>
                       <a:prstDash val="solid"/>
                       <a:round/>
@@ -3683,7 +4912,7 @@
                     </a:lnL>
                     <a:lnR w="9525" cap="flat" cmpd="sng" algn="ctr">
                       <a:solidFill>
-                        <a:srgbClr val="B8C4C3"/>
+                        <a:srgbClr val="D5DCE6"/>
                       </a:solidFill>
                       <a:prstDash val="solid"/>
                       <a:round/>
@@ -3692,7 +4921,7 @@
                     </a:lnR>
                     <a:lnT w="9525" cap="flat" cmpd="sng" algn="ctr">
                       <a:solidFill>
-                        <a:srgbClr val="B8C4C3"/>
+                        <a:srgbClr val="D5DCE6"/>
                       </a:solidFill>
                       <a:prstDash val="solid"/>
                       <a:round/>
@@ -3701,13 +4930,16 @@
                     </a:lnT>
                     <a:lnB w="9525" cap="flat" cmpd="sng" algn="ctr">
                       <a:solidFill>
-                        <a:srgbClr val="B8C4C3"/>
+                        <a:srgbClr val="D5DCE6"/>
                       </a:solidFill>
                       <a:prstDash val="solid"/>
                       <a:round/>
                       <a:headEnd type="none" w="med" len="med"/>
                       <a:tailEnd type="none" w="med" len="med"/>
                     </a:lnB>
+                    <a:solidFill>
+                      <a:srgbClr val="FFFFFF"/>
+                    </a:solidFill>
                   </a:tcPr>
                 </a:tc>
                 <a:tc>
@@ -3721,7 +4953,7 @@
                       <a:r>
                         <a:rPr lang="en-US" sz="1400" dirty="0">
                           <a:solidFill>
-                            <a:srgbClr val="1B1F2A"/>
+                            <a:srgbClr val="1A2433"/>
                           </a:solidFill>
                         </a:rPr>
                         <a:t>A, B hoặc C</a:t>
@@ -3732,7 +4964,7 @@
                   <a:tcPr marL="91440" marR="91440" marT="54864" marB="54864" anchor="ctr">
                     <a:lnL w="9525" cap="flat" cmpd="sng" algn="ctr">
                       <a:solidFill>
-                        <a:srgbClr val="B8C4C3"/>
+                        <a:srgbClr val="D5DCE6"/>
                       </a:solidFill>
                       <a:prstDash val="solid"/>
                       <a:round/>
@@ -3741,7 +4973,7 @@
                     </a:lnL>
                     <a:lnR w="9525" cap="flat" cmpd="sng" algn="ctr">
                       <a:solidFill>
-                        <a:srgbClr val="B8C4C3"/>
+                        <a:srgbClr val="D5DCE6"/>
                       </a:solidFill>
                       <a:prstDash val="solid"/>
                       <a:round/>
@@ -3750,7 +4982,7 @@
                     </a:lnR>
                     <a:lnT w="9525" cap="flat" cmpd="sng" algn="ctr">
                       <a:solidFill>
-                        <a:srgbClr val="B8C4C3"/>
+                        <a:srgbClr val="D5DCE6"/>
                       </a:solidFill>
                       <a:prstDash val="solid"/>
                       <a:round/>
@@ -3759,13 +4991,16 @@
                     </a:lnT>
                     <a:lnB w="9525" cap="flat" cmpd="sng" algn="ctr">
                       <a:solidFill>
-                        <a:srgbClr val="B8C4C3"/>
+                        <a:srgbClr val="D5DCE6"/>
                       </a:solidFill>
                       <a:prstDash val="solid"/>
                       <a:round/>
                       <a:headEnd type="none" w="med" len="med"/>
                       <a:tailEnd type="none" w="med" len="med"/>
                     </a:lnB>
+                    <a:solidFill>
+                      <a:srgbClr val="FFFFFF"/>
+                    </a:solidFill>
                   </a:tcPr>
                 </a:tc>
                 <a:tc>
@@ -3779,7 +5014,7 @@
                       <a:r>
                         <a:rPr lang="en-US" sz="1400" dirty="0">
                           <a:solidFill>
-                            <a:srgbClr val="1B1F2A"/>
+                            <a:srgbClr val="1A2433"/>
                           </a:solidFill>
                         </a:rPr>
                         <a:t>Chưa đủ căn cứ để khuyến nghị: thiếu báo giá C và đánh giá chiến lược của B</a:t>
@@ -3790,7 +5025,7 @@
                   <a:tcPr marL="91440" marR="91440" marT="54864" marB="54864" anchor="ctr">
                     <a:lnL w="9525" cap="flat" cmpd="sng" algn="ctr">
                       <a:solidFill>
-                        <a:srgbClr val="B8C4C3"/>
+                        <a:srgbClr val="D5DCE6"/>
                       </a:solidFill>
                       <a:prstDash val="solid"/>
                       <a:round/>
@@ -3799,7 +5034,7 @@
                     </a:lnL>
                     <a:lnR w="9525" cap="flat" cmpd="sng" algn="ctr">
                       <a:solidFill>
-                        <a:srgbClr val="B8C4C3"/>
+                        <a:srgbClr val="D5DCE6"/>
                       </a:solidFill>
                       <a:prstDash val="solid"/>
                       <a:round/>
@@ -3808,7 +5043,7 @@
                     </a:lnR>
                     <a:lnT w="9525" cap="flat" cmpd="sng" algn="ctr">
                       <a:solidFill>
-                        <a:srgbClr val="B8C4C3"/>
+                        <a:srgbClr val="D5DCE6"/>
                       </a:solidFill>
                       <a:prstDash val="solid"/>
                       <a:round/>
@@ -3817,13 +5052,16 @@
                     </a:lnT>
                     <a:lnB w="9525" cap="flat" cmpd="sng" algn="ctr">
                       <a:solidFill>
-                        <a:srgbClr val="B8C4C3"/>
+                        <a:srgbClr val="D5DCE6"/>
                       </a:solidFill>
                       <a:prstDash val="solid"/>
                       <a:round/>
                       <a:headEnd type="none" w="med" len="med"/>
                       <a:tailEnd type="none" w="med" len="med"/>
                     </a:lnB>
+                    <a:solidFill>
+                      <a:srgbClr val="FFFFFF"/>
+                    </a:solidFill>
                   </a:tcPr>
                 </a:tc>
               </a:tr>
@@ -3839,7 +5077,7 @@
                       <a:r>
                         <a:rPr lang="en-US" sz="1400" b="1" dirty="0">
                           <a:solidFill>
-                            <a:srgbClr val="1B1F2A"/>
+                            <a:srgbClr val="1A2433"/>
                           </a:solidFill>
                         </a:rPr>
                         <a:t>Có triển khai giai đoạn 1 của B trước không</a:t>
@@ -3850,7 +5088,7 @@
                   <a:tcPr marL="91440" marR="91440" marT="54864" marB="54864" anchor="ctr">
                     <a:lnL w="9525" cap="flat" cmpd="sng" algn="ctr">
                       <a:solidFill>
-                        <a:srgbClr val="B8C4C3"/>
+                        <a:srgbClr val="D5DCE6"/>
                       </a:solidFill>
                       <a:prstDash val="solid"/>
                       <a:round/>
@@ -3859,7 +5097,7 @@
                     </a:lnL>
                     <a:lnR w="9525" cap="flat" cmpd="sng" algn="ctr">
                       <a:solidFill>
-                        <a:srgbClr val="B8C4C3"/>
+                        <a:srgbClr val="D5DCE6"/>
                       </a:solidFill>
                       <a:prstDash val="solid"/>
                       <a:round/>
@@ -3868,7 +5106,7 @@
                     </a:lnR>
                     <a:lnT w="9525" cap="flat" cmpd="sng" algn="ctr">
                       <a:solidFill>
-                        <a:srgbClr val="B8C4C3"/>
+                        <a:srgbClr val="D5DCE6"/>
                       </a:solidFill>
                       <a:prstDash val="solid"/>
                       <a:round/>
@@ -3877,13 +5115,16 @@
                     </a:lnT>
                     <a:lnB w="9525" cap="flat" cmpd="sng" algn="ctr">
                       <a:solidFill>
-                        <a:srgbClr val="B8C4C3"/>
+                        <a:srgbClr val="D5DCE6"/>
                       </a:solidFill>
                       <a:prstDash val="solid"/>
                       <a:round/>
                       <a:headEnd type="none" w="med" len="med"/>
                       <a:tailEnd type="none" w="med" len="med"/>
                     </a:lnB>
+                    <a:solidFill>
+                      <a:srgbClr val="F1F4F8"/>
+                    </a:solidFill>
                   </a:tcPr>
                 </a:tc>
                 <a:tc>
@@ -3897,7 +5138,7 @@
                       <a:r>
                         <a:rPr lang="en-US" sz="1400" dirty="0">
                           <a:solidFill>
-                            <a:srgbClr val="1B1F2A"/>
+                            <a:srgbClr val="1A2433"/>
                           </a:solidFill>
                         </a:rPr>
                         <a:t>Có / không</a:t>
@@ -3908,7 +5149,7 @@
                   <a:tcPr marL="91440" marR="91440" marT="54864" marB="54864" anchor="ctr">
                     <a:lnL w="9525" cap="flat" cmpd="sng" algn="ctr">
                       <a:solidFill>
-                        <a:srgbClr val="B8C4C3"/>
+                        <a:srgbClr val="D5DCE6"/>
                       </a:solidFill>
                       <a:prstDash val="solid"/>
                       <a:round/>
@@ -3917,7 +5158,7 @@
                     </a:lnL>
                     <a:lnR w="9525" cap="flat" cmpd="sng" algn="ctr">
                       <a:solidFill>
-                        <a:srgbClr val="B8C4C3"/>
+                        <a:srgbClr val="D5DCE6"/>
                       </a:solidFill>
                       <a:prstDash val="solid"/>
                       <a:round/>
@@ -3926,7 +5167,7 @@
                     </a:lnR>
                     <a:lnT w="9525" cap="flat" cmpd="sng" algn="ctr">
                       <a:solidFill>
-                        <a:srgbClr val="B8C4C3"/>
+                        <a:srgbClr val="D5DCE6"/>
                       </a:solidFill>
                       <a:prstDash val="solid"/>
                       <a:round/>
@@ -3935,13 +5176,16 @@
                     </a:lnT>
                     <a:lnB w="9525" cap="flat" cmpd="sng" algn="ctr">
                       <a:solidFill>
-                        <a:srgbClr val="B8C4C3"/>
+                        <a:srgbClr val="D5DCE6"/>
                       </a:solidFill>
                       <a:prstDash val="solid"/>
                       <a:round/>
                       <a:headEnd type="none" w="med" len="med"/>
                       <a:tailEnd type="none" w="med" len="med"/>
                     </a:lnB>
+                    <a:solidFill>
+                      <a:srgbClr val="F1F4F8"/>
+                    </a:solidFill>
                   </a:tcPr>
                 </a:tc>
                 <a:tc>
@@ -3955,7 +5199,7 @@
                       <a:r>
                         <a:rPr lang="en-US" sz="1400" dirty="0">
                           <a:solidFill>
-                            <a:srgbClr val="1B1F2A"/>
+                            <a:srgbClr val="1A2433"/>
                           </a:solidFill>
                         </a:rPr>
                         <a:t>Khả thi về chi phí và thời gian theo báo giá NCC-01; chưa có xác nhận ngân sách giai đoạn 2</a:t>
@@ -3966,7 +5210,7 @@
                   <a:tcPr marL="91440" marR="91440" marT="54864" marB="54864" anchor="ctr">
                     <a:lnL w="9525" cap="flat" cmpd="sng" algn="ctr">
                       <a:solidFill>
-                        <a:srgbClr val="B8C4C3"/>
+                        <a:srgbClr val="D5DCE6"/>
                       </a:solidFill>
                       <a:prstDash val="solid"/>
                       <a:round/>
@@ -3975,7 +5219,7 @@
                     </a:lnL>
                     <a:lnR w="9525" cap="flat" cmpd="sng" algn="ctr">
                       <a:solidFill>
-                        <a:srgbClr val="B8C4C3"/>
+                        <a:srgbClr val="D5DCE6"/>
                       </a:solidFill>
                       <a:prstDash val="solid"/>
                       <a:round/>
@@ -3984,7 +5228,7 @@
                     </a:lnR>
                     <a:lnT w="9525" cap="flat" cmpd="sng" algn="ctr">
                       <a:solidFill>
-                        <a:srgbClr val="B8C4C3"/>
+                        <a:srgbClr val="D5DCE6"/>
                       </a:solidFill>
                       <a:prstDash val="solid"/>
                       <a:round/>
@@ -3993,13 +5237,16 @@
                     </a:lnT>
                     <a:lnB w="9525" cap="flat" cmpd="sng" algn="ctr">
                       <a:solidFill>
-                        <a:srgbClr val="B8C4C3"/>
+                        <a:srgbClr val="D5DCE6"/>
                       </a:solidFill>
                       <a:prstDash val="solid"/>
                       <a:round/>
                       <a:headEnd type="none" w="med" len="med"/>
                       <a:tailEnd type="none" w="med" len="med"/>
                     </a:lnB>
+                    <a:solidFill>
+                      <a:srgbClr val="F1F4F8"/>
+                    </a:solidFill>
                   </a:tcPr>
                 </a:tc>
               </a:tr>
@@ -4015,8 +5262,8 @@
         </p:nvSpPr>
         <p:spPr>
           <a:xfrm>
-            <a:off x="457200" y="4617720"/>
-            <a:ext cx="8229600" cy="320040"/>
+            <a:off x="548640" y="4416552"/>
+            <a:ext cx="8046720" cy="274320"/>
           </a:xfrm>
           <a:prstGeom prst="rect">
             <a:avLst/>
@@ -4034,12 +5281,57 @@
             <a:r>
               <a:rPr lang="en-US" sz="1100" i="1" dirty="0">
                 <a:solidFill>
-                  <a:srgbClr val="5A6666"/>
+                  <a:srgbClr val="6B7A90"/>
                 </a:solidFill>
               </a:rPr>
               <a:t>Nguồn: báo giá NCC-01 (mẫu), ý kiến phòng Tài chính</a:t>
             </a:r>
             <a:endParaRPr lang="en-US" sz="1100" dirty="0"/>
+          </a:p>
+        </p:txBody>
+      </p:sp>
+      <p:sp>
+        <p:nvSpPr>
+          <p:cNvPr id="25" name="Slide Number Placeholder 0"/>
+          <p:cNvSpPr>
+            <a:spLocks noGrp="1"/>
+          </p:cNvSpPr>
+          <p:nvPr>
+            <p:ph type="sldNum" sz="quarter" idx="4294967295"/>
+          </p:nvPr>
+        </p:nvSpPr>
+        <p:spPr>
+          <a:xfrm>
+            <a:off x="8138160" y="4727448"/>
+            <a:ext cx="457200" cy="274320"/>
+          </a:xfrm>
+          <a:prstGeom prst="rect">
+            <a:avLst/>
+          </a:prstGeom>
+          <a:extLst>
+            <a:ext uri="{C572A759-6A51-4108-AA02-DFA0A04FC94B}">
+              <ma14:wrappingTextBoxFlag xmlns:ma14="http://schemas.microsoft.com/office/mac/drawingml/2011/main" val="0"/>
+            </a:ext>
+          </a:extLst>
+        </p:spPr>
+        <p:txBody>
+          <a:bodyPr/>
+          <a:lstStyle>
+            <a:lvl1pPr>
+              <a:defRPr sz="1100">
+                <a:solidFill>
+                  <a:srgbClr val="6B7A90"/>
+                </a:solidFill>
+              </a:defRPr>
+            </a:lvl1pPr>
+          </a:lstStyle>
+          <a:p>
+            <a:pPr algn="r"/>
+            <a:fld id="{F7021451-1387-4CA6-816F-3879F97B5CBC}" type="slidenum">
+              <a:rPr b="0" lang="en-US"/>
+              <a:t>5</a:t>
+            </a:fld>
+            <a:endParaRPr lang="en-US"/>
           </a:p>
         </p:txBody>
       </p:sp>
@@ -4052,47 +5344,47 @@
 </file>
 
 <file path=ppt/theme/theme1.xml><?xml version="1.0" encoding="utf-8"?>
-<a:theme xmlns:a="http://schemas.openxmlformats.org/drawingml/2006/main" name="Thu nghiem">
+<a:theme xmlns:a="http://schemas.openxmlformats.org/drawingml/2006/main" name="Dai hoc">
   <a:themeElements>
-    <a:clrScheme name="Thu nghiem">
+    <a:clrScheme name="Dai hoc">
       <a:dk1>
-        <a:srgbClr val="1B1F2A"/>
+        <a:srgbClr val="1A2433"/>
       </a:dk1>
       <a:lt1>
         <a:srgbClr val="FFFFFF"/>
       </a:lt1>
       <a:dk2>
-        <a:srgbClr val="0F3D3E"/>
+        <a:srgbClr val="0B2A4A"/>
       </a:dk2>
       <a:lt2>
-        <a:srgbClr val="EEF3F2"/>
+        <a:srgbClr val="F1F4F8"/>
       </a:lt2>
       <a:accent1>
-        <a:srgbClr val="0F6E6E"/>
+        <a:srgbClr val="1F4E8C"/>
       </a:accent1>
       <a:accent2>
-        <a:srgbClr val="D9822B"/>
+        <a:srgbClr val="B8902B"/>
       </a:accent2>
       <a:accent3>
-        <a:srgbClr val="5B8DB8"/>
+        <a:srgbClr val="2E7D6B"/>
       </a:accent3>
       <a:accent4>
-        <a:srgbClr val="7A8B8B"/>
+        <a:srgbClr val="6B7A90"/>
       </a:accent4>
       <a:accent5>
-        <a:srgbClr val="B5473A"/>
+        <a:srgbClr val="A23B3B"/>
       </a:accent5>
       <a:accent6>
-        <a:srgbClr val="3E7C4F"/>
+        <a:srgbClr val="5B8DB8"/>
       </a:accent6>
       <a:hlink>
-        <a:srgbClr val="0F6E6E"/>
+        <a:srgbClr val="1F4E8C"/>
       </a:hlink>
       <a:folHlink>
-        <a:srgbClr val="7A8B8B"/>
+        <a:srgbClr val="6B7A90"/>
       </a:folHlink>
     </a:clrScheme>
-    <a:fontScheme name="Thu nghiem">
+    <a:fontScheme name="Dai hoc">
       <a:majorFont>
         <a:latin typeface="Cambria"/>
         <a:ea typeface=""/>
